--- a/slides/week11.pptx
+++ b/slides/week11.pptx
@@ -1923,8 +1923,8 @@
         </p:nvSpPr>
         <p:spPr/>
       </p:sp>
-      <mc:AlternateContent xmlns:mc="http://schemas.openxmlformats.org/markup-compatibility/2006">
-        <mc:Choice xmlns:a14="http://schemas.microsoft.com/office/drawing/2010/main" Requires="a14">
+      <mc:AlternateContent xmlns:mc="http://schemas.openxmlformats.org/markup-compatibility/2006" xmlns:a14="http://schemas.microsoft.com/office/drawing/2010/main">
+        <mc:Choice Requires="a14">
           <p:sp>
             <p:nvSpPr>
               <p:cNvPr id="3" name="Segnaposto note 2">
@@ -1999,7 +1999,7 @@
             </p:txBody>
           </p:sp>
         </mc:Choice>
-        <mc:Fallback>
+        <mc:Fallback xmlns="">
           <p:sp>
             <p:nvSpPr>
               <p:cNvPr id="3" name="Segnaposto note 2">
@@ -6391,8 +6391,8 @@
           </a:p>
         </p:txBody>
       </p:sp>
-      <mc:AlternateContent xmlns:mc="http://schemas.openxmlformats.org/markup-compatibility/2006">
-        <mc:Choice xmlns:a14="http://schemas.microsoft.com/office/drawing/2010/main" Requires="a14">
+      <mc:AlternateContent xmlns:mc="http://schemas.openxmlformats.org/markup-compatibility/2006" xmlns:a14="http://schemas.microsoft.com/office/drawing/2010/main">
+        <mc:Choice Requires="a14">
           <p:sp>
             <p:nvSpPr>
               <p:cNvPr id="8" name="Content Placeholder 7">
@@ -6844,7 +6844,7 @@
             </p:txBody>
           </p:sp>
         </mc:Choice>
-        <mc:Fallback>
+        <mc:Fallback xmlns="">
           <p:sp>
             <p:nvSpPr>
               <p:cNvPr id="8" name="Content Placeholder 7">
@@ -6924,8 +6924,8 @@
           </a:prstGeom>
         </p:spPr>
       </p:pic>
-      <mc:AlternateContent xmlns:mc="http://schemas.openxmlformats.org/markup-compatibility/2006">
-        <mc:Choice xmlns:a14="http://schemas.microsoft.com/office/drawing/2010/main" Requires="a14">
+      <mc:AlternateContent xmlns:mc="http://schemas.openxmlformats.org/markup-compatibility/2006" xmlns:a14="http://schemas.microsoft.com/office/drawing/2010/main">
+        <mc:Choice Requires="a14">
           <p:sp>
             <p:nvSpPr>
               <p:cNvPr id="7" name="TextBox 6">
@@ -7079,7 +7079,7 @@
             </p:txBody>
           </p:sp>
         </mc:Choice>
-        <mc:Fallback>
+        <mc:Fallback xmlns="">
           <p:sp>
             <p:nvSpPr>
               <p:cNvPr id="7" name="TextBox 6">
@@ -7124,8 +7124,8 @@
           </p:sp>
         </mc:Fallback>
       </mc:AlternateContent>
-      <mc:AlternateContent xmlns:mc="http://schemas.openxmlformats.org/markup-compatibility/2006">
-        <mc:Choice xmlns:a14="http://schemas.microsoft.com/office/drawing/2010/main" Requires="a14">
+      <mc:AlternateContent xmlns:mc="http://schemas.openxmlformats.org/markup-compatibility/2006" xmlns:a14="http://schemas.microsoft.com/office/drawing/2010/main">
+        <mc:Choice Requires="a14">
           <p:sp>
             <p:nvSpPr>
               <p:cNvPr id="12" name="TextBox 11">
@@ -7297,7 +7297,7 @@
             </p:txBody>
           </p:sp>
         </mc:Choice>
-        <mc:Fallback>
+        <mc:Fallback xmlns="">
           <p:sp>
             <p:nvSpPr>
               <p:cNvPr id="12" name="TextBox 11">
@@ -8743,13 +8743,6 @@
                   <a:buFont typeface="Arial" panose="020B0604020202020204" pitchFamily="34" charset="0"/>
                   <a:buNone/>
                 </a:pPr>
-                <a:endParaRPr lang="it-IT" sz="2400" dirty="0"/>
-              </a:p>
-              <a:p>
-                <a:pPr marL="0" indent="0">
-                  <a:buFont typeface="Arial" panose="020B0604020202020204" pitchFamily="34" charset="0"/>
-                  <a:buNone/>
-                </a:pPr>
                 <a:r>
                   <a:rPr lang="it-IT" sz="2400" dirty="0"/>
                   <a:t>Out of 200k particles only </a:t>
@@ -8874,7 +8867,16 @@
                 </a:r>
               </a:p>
               <a:p>
-                <a:endParaRPr lang="it-IT" sz="2400" dirty="0"/>
+                <a:r>
+                  <a:rPr lang="it-IT" sz="2400" dirty="0"/>
+                  <a:t>Analysing the impact position that the lost particles would have had, they would have both been outside or inside the crystal (they are getting lost also if they would have travel through air)</a:t>
+                </a:r>
+              </a:p>
+              <a:p>
+                <a:r>
+                  <a:rPr lang="it-IT" sz="2400" dirty="0"/>
+                  <a:t>Aperture values, energy cut, ...</a:t>
+                </a:r>
               </a:p>
             </p:txBody>
           </p:sp>
@@ -8905,7 +8907,7 @@
               <a:blipFill>
                 <a:blip r:embed="rId4"/>
                 <a:stretch>
-                  <a:fillRect l="-1292" r="-1895"/>
+                  <a:fillRect l="-1292" t="-1629" r="-1895"/>
                 </a:stretch>
               </a:blipFill>
             </p:spPr>
@@ -9228,8 +9230,8 @@
           </a:p>
         </p:txBody>
       </p:sp>
-      <mc:AlternateContent xmlns:mc="http://schemas.openxmlformats.org/markup-compatibility/2006">
-        <mc:Choice xmlns:a14="http://schemas.microsoft.com/office/drawing/2010/main" Requires="a14">
+      <mc:AlternateContent xmlns:mc="http://schemas.openxmlformats.org/markup-compatibility/2006" xmlns:a14="http://schemas.microsoft.com/office/drawing/2010/main">
+        <mc:Choice Requires="a14">
           <p:sp>
             <p:nvSpPr>
               <p:cNvPr id="8" name="Content Placeholder 7">
@@ -9359,7 +9361,7 @@
             </p:txBody>
           </p:sp>
         </mc:Choice>
-        <mc:Fallback>
+        <mc:Fallback xmlns="">
           <p:sp>
             <p:nvSpPr>
               <p:cNvPr id="8" name="Content Placeholder 7">
@@ -17488,8 +17490,8 @@
           </a:fontRef>
         </p:style>
       </p:cxnSp>
-      <mc:AlternateContent xmlns:mc="http://schemas.openxmlformats.org/markup-compatibility/2006">
-        <mc:Choice xmlns:a14="http://schemas.microsoft.com/office/drawing/2010/main" Requires="a14">
+      <mc:AlternateContent xmlns:mc="http://schemas.openxmlformats.org/markup-compatibility/2006" xmlns:a14="http://schemas.microsoft.com/office/drawing/2010/main">
+        <mc:Choice Requires="a14">
           <p:sp>
             <p:nvSpPr>
               <p:cNvPr id="24" name="Rectangle: Rounded Corners 23">
@@ -17561,43 +17563,7 @@
                           </a:solidFill>
                           <a:latin typeface="Cambria Math" panose="02040503050406030204" pitchFamily="18" charset="0"/>
                         </a:rPr>
-                        <m:t>2.091</m:t>
-                      </m:r>
-                      <m:r>
-                        <a:rPr lang="it-IT" sz="2000" b="0" i="1" smtClean="0">
-                          <a:solidFill>
-                            <a:schemeClr val="tx1"/>
-                          </a:solidFill>
-                          <a:latin typeface="Cambria Math" panose="02040503050406030204" pitchFamily="18" charset="0"/>
-                        </a:rPr>
-                        <m:t>1</m:t>
-                      </m:r>
-                      <m:r>
-                        <a:rPr lang="it-IT" sz="2000" b="0" i="1" smtClean="0">
-                          <a:solidFill>
-                            <a:schemeClr val="tx1"/>
-                          </a:solidFill>
-                          <a:latin typeface="Cambria Math" panose="02040503050406030204" pitchFamily="18" charset="0"/>
-                        </a:rPr>
-                        <m:t>±0.00</m:t>
-                      </m:r>
-                      <m:r>
-                        <a:rPr lang="it-IT" sz="2000" b="0" i="1" smtClean="0">
-                          <a:solidFill>
-                            <a:schemeClr val="tx1"/>
-                          </a:solidFill>
-                          <a:latin typeface="Cambria Math" panose="02040503050406030204" pitchFamily="18" charset="0"/>
-                        </a:rPr>
-                        <m:t>0</m:t>
-                      </m:r>
-                      <m:r>
-                        <a:rPr lang="it-IT" sz="2000" b="0" i="1" smtClean="0">
-                          <a:solidFill>
-                            <a:schemeClr val="tx1"/>
-                          </a:solidFill>
-                          <a:latin typeface="Cambria Math" panose="02040503050406030204" pitchFamily="18" charset="0"/>
-                        </a:rPr>
-                        <m:t>4</m:t>
+                        <m:t>2.0911±0.0004</m:t>
                       </m:r>
                     </m:oMath>
                   </m:oMathPara>
@@ -17611,7 +17577,7 @@
             </p:txBody>
           </p:sp>
         </mc:Choice>
-        <mc:Fallback>
+        <mc:Fallback xmlns="">
           <p:sp>
             <p:nvSpPr>
               <p:cNvPr id="24" name="Rectangle: Rounded Corners 23">
@@ -17706,8 +17672,8 @@
           </a:fontRef>
         </p:style>
       </p:cxnSp>
-      <mc:AlternateContent xmlns:mc="http://schemas.openxmlformats.org/markup-compatibility/2006">
-        <mc:Choice xmlns:a14="http://schemas.microsoft.com/office/drawing/2010/main" Requires="a14">
+      <mc:AlternateContent xmlns:mc="http://schemas.openxmlformats.org/markup-compatibility/2006" xmlns:a14="http://schemas.microsoft.com/office/drawing/2010/main">
+        <mc:Choice Requires="a14">
           <p:sp>
             <p:nvSpPr>
               <p:cNvPr id="9" name="Rectangle: Rounded Corners 8">
@@ -17833,7 +17799,7 @@
             </p:txBody>
           </p:sp>
         </mc:Choice>
-        <mc:Fallback>
+        <mc:Fallback xmlns="">
           <p:sp>
             <p:nvSpPr>
               <p:cNvPr id="9" name="Rectangle: Rounded Corners 8">
@@ -18274,8 +18240,8 @@
           </a:p>
         </p:txBody>
       </p:sp>
-      <mc:AlternateContent xmlns:mc="http://schemas.openxmlformats.org/markup-compatibility/2006">
-        <mc:Choice xmlns:a14="http://schemas.microsoft.com/office/drawing/2010/main" Requires="a14">
+      <mc:AlternateContent xmlns:mc="http://schemas.openxmlformats.org/markup-compatibility/2006" xmlns:a14="http://schemas.microsoft.com/office/drawing/2010/main">
+        <mc:Choice Requires="a14">
           <p:sp>
             <p:nvSpPr>
               <p:cNvPr id="8" name="Content Placeholder 7">
@@ -18624,7 +18590,7 @@
             </p:txBody>
           </p:sp>
         </mc:Choice>
-        <mc:Fallback>
+        <mc:Fallback xmlns="">
           <p:sp>
             <p:nvSpPr>
               <p:cNvPr id="8" name="Content Placeholder 7">
@@ -18712,8 +18678,8 @@
           </a:fontRef>
         </p:style>
       </p:cxnSp>
-      <mc:AlternateContent xmlns:mc="http://schemas.openxmlformats.org/markup-compatibility/2006">
-        <mc:Choice xmlns:a14="http://schemas.microsoft.com/office/drawing/2010/main" Requires="a14">
+      <mc:AlternateContent xmlns:mc="http://schemas.openxmlformats.org/markup-compatibility/2006" xmlns:a14="http://schemas.microsoft.com/office/drawing/2010/main">
+        <mc:Choice Requires="a14">
           <p:sp>
             <p:nvSpPr>
               <p:cNvPr id="18" name="Rectangle: Rounded Corners 17">
@@ -19152,7 +19118,7 @@
             </p:txBody>
           </p:sp>
         </mc:Choice>
-        <mc:Fallback>
+        <mc:Fallback xmlns="">
           <p:sp>
             <p:nvSpPr>
               <p:cNvPr id="18" name="Rectangle: Rounded Corners 17">
@@ -19246,8 +19212,8 @@
           </a:fontRef>
         </p:style>
       </p:cxnSp>
-      <mc:AlternateContent xmlns:mc="http://schemas.openxmlformats.org/markup-compatibility/2006">
-        <mc:Choice xmlns:a14="http://schemas.microsoft.com/office/drawing/2010/main" Requires="a14">
+      <mc:AlternateContent xmlns:mc="http://schemas.openxmlformats.org/markup-compatibility/2006" xmlns:a14="http://schemas.microsoft.com/office/drawing/2010/main">
+        <mc:Choice Requires="a14">
           <p:sp>
             <p:nvSpPr>
               <p:cNvPr id="20" name="Rectangle: Rounded Corners 19">
@@ -19651,7 +19617,7 @@
             </p:txBody>
           </p:sp>
         </mc:Choice>
-        <mc:Fallback>
+        <mc:Fallback xmlns="">
           <p:sp>
             <p:nvSpPr>
               <p:cNvPr id="20" name="Rectangle: Rounded Corners 19">
@@ -19753,8 +19719,8 @@
           </a:p>
         </p:txBody>
       </p:sp>
-      <mc:AlternateContent xmlns:mc="http://schemas.openxmlformats.org/markup-compatibility/2006">
-        <mc:Choice xmlns:a14="http://schemas.microsoft.com/office/drawing/2010/main" Requires="a14">
+      <mc:AlternateContent xmlns:mc="http://schemas.openxmlformats.org/markup-compatibility/2006" xmlns:a14="http://schemas.microsoft.com/office/drawing/2010/main">
+        <mc:Choice Requires="a14">
           <p:sp>
             <p:nvSpPr>
               <p:cNvPr id="21" name="TextBox 20">
@@ -19817,7 +19783,7 @@
             </p:txBody>
           </p:sp>
         </mc:Choice>
-        <mc:Fallback>
+        <mc:Fallback xmlns="">
           <p:sp>
             <p:nvSpPr>
               <p:cNvPr id="21" name="TextBox 20">
@@ -21020,8 +20986,8 @@
           </a:p>
         </p:txBody>
       </p:sp>
-      <mc:AlternateContent xmlns:mc="http://schemas.openxmlformats.org/markup-compatibility/2006">
-        <mc:Choice xmlns:a14="http://schemas.microsoft.com/office/drawing/2010/main" Requires="a14">
+      <mc:AlternateContent xmlns:mc="http://schemas.openxmlformats.org/markup-compatibility/2006" xmlns:a14="http://schemas.microsoft.com/office/drawing/2010/main">
+        <mc:Choice Requires="a14">
           <p:sp>
             <p:nvSpPr>
               <p:cNvPr id="12" name="Rectangle: Rounded Corners 11">
@@ -21284,7 +21250,7 @@
             </p:txBody>
           </p:sp>
         </mc:Choice>
-        <mc:Fallback>
+        <mc:Fallback xmlns="">
           <p:sp>
             <p:nvSpPr>
               <p:cNvPr id="12" name="Rectangle: Rounded Corners 11">
@@ -21334,8 +21300,8 @@
           </p:sp>
         </mc:Fallback>
       </mc:AlternateContent>
-      <mc:AlternateContent xmlns:mc="http://schemas.openxmlformats.org/markup-compatibility/2006">
-        <mc:Choice xmlns:a14="http://schemas.microsoft.com/office/drawing/2010/main" Requires="a14">
+      <mc:AlternateContent xmlns:mc="http://schemas.openxmlformats.org/markup-compatibility/2006" xmlns:a14="http://schemas.microsoft.com/office/drawing/2010/main">
+        <mc:Choice Requires="a14">
           <p:sp>
             <p:nvSpPr>
               <p:cNvPr id="16" name="Rectangle: Rounded Corners 15">
@@ -21448,7 +21414,7 @@
             </p:txBody>
           </p:sp>
         </mc:Choice>
-        <mc:Fallback>
+        <mc:Fallback xmlns="">
           <p:sp>
             <p:nvSpPr>
               <p:cNvPr id="16" name="Rectangle: Rounded Corners 15">
@@ -21588,8 +21554,8 @@
           </a:fontRef>
         </p:style>
       </p:cxnSp>
-      <mc:AlternateContent xmlns:mc="http://schemas.openxmlformats.org/markup-compatibility/2006">
-        <mc:Choice xmlns:a14="http://schemas.microsoft.com/office/drawing/2010/main" Requires="a14">
+      <mc:AlternateContent xmlns:mc="http://schemas.openxmlformats.org/markup-compatibility/2006" xmlns:a14="http://schemas.microsoft.com/office/drawing/2010/main">
+        <mc:Choice Requires="a14">
           <p:sp>
             <p:nvSpPr>
               <p:cNvPr id="23" name="Rectangle: Rounded Corners 22">
@@ -21737,7 +21703,7 @@
             </p:txBody>
           </p:sp>
         </mc:Choice>
-        <mc:Fallback>
+        <mc:Fallback xmlns="">
           <p:sp>
             <p:nvSpPr>
               <p:cNvPr id="23" name="Rectangle: Rounded Corners 22">
@@ -21832,8 +21798,8 @@
           </a:fontRef>
         </p:style>
       </p:cxnSp>
-      <mc:AlternateContent xmlns:mc="http://schemas.openxmlformats.org/markup-compatibility/2006">
-        <mc:Choice xmlns:a14="http://schemas.microsoft.com/office/drawing/2010/main" Requires="a14">
+      <mc:AlternateContent xmlns:mc="http://schemas.openxmlformats.org/markup-compatibility/2006" xmlns:a14="http://schemas.microsoft.com/office/drawing/2010/main">
+        <mc:Choice Requires="a14">
           <p:sp>
             <p:nvSpPr>
               <p:cNvPr id="40" name="Rectangle: Rounded Corners 39">
@@ -22064,7 +22030,7 @@
             </p:txBody>
           </p:sp>
         </mc:Choice>
-        <mc:Fallback>
+        <mc:Fallback xmlns="">
           <p:sp>
             <p:nvSpPr>
               <p:cNvPr id="40" name="Rectangle: Rounded Corners 39">

--- a/slides/week11.pptx
+++ b/slides/week11.pptx
@@ -8506,377 +8506,641 @@
           </a:p>
         </p:txBody>
       </p:sp>
-      <p:pic>
-        <p:nvPicPr>
-          <p:cNvPr id="7" name="Content Placeholder 6">
-            <a:extLst>
-              <a:ext uri="{FF2B5EF4-FFF2-40B4-BE49-F238E27FC236}">
-                <a16:creationId xmlns:a16="http://schemas.microsoft.com/office/drawing/2014/main" id="{AD807C3B-110A-2326-741C-BB0A2B2F2E8B}"/>
-              </a:ext>
-            </a:extLst>
-          </p:cNvPr>
-          <p:cNvPicPr>
-            <a:picLocks noGrp="1" noChangeAspect="1"/>
-          </p:cNvPicPr>
-          <p:nvPr>
-            <p:ph idx="1"/>
-          </p:nvPr>
-        </p:nvPicPr>
-        <p:blipFill>
-          <a:blip r:embed="rId3">
-            <a:extLst>
-              <a:ext uri="{28A0092B-C50C-407E-A947-70E740481C1C}">
-                <a14:useLocalDpi xmlns:a14="http://schemas.microsoft.com/office/drawing/2010/main" val="0"/>
-              </a:ext>
-            </a:extLst>
-          </a:blip>
-          <a:srcRect l="50000"/>
-          <a:stretch>
-            <a:fillRect/>
-          </a:stretch>
-        </p:blipFill>
+      <p:sp>
+        <p:nvSpPr>
+          <p:cNvPr id="9" name="Content Placeholder 7">
+            <a:extLst>
+              <a:ext uri="{FF2B5EF4-FFF2-40B4-BE49-F238E27FC236}">
+                <a16:creationId xmlns:a16="http://schemas.microsoft.com/office/drawing/2014/main" id="{B4BC83D3-748A-A91A-0C8B-2D2C2930A9ED}"/>
+              </a:ext>
+            </a:extLst>
+          </p:cNvPr>
+          <p:cNvSpPr txBox="1">
+            <a:spLocks/>
+          </p:cNvSpPr>
+          <p:nvPr/>
+        </p:nvSpPr>
         <p:spPr>
           <a:xfrm>
-            <a:off x="508000" y="2217922"/>
-            <a:ext cx="3771900" cy="3143249"/>
+            <a:off x="4279900" y="1312438"/>
+            <a:ext cx="7073900" cy="4864525"/>
           </a:xfrm>
           <a:prstGeom prst="rect">
             <a:avLst/>
           </a:prstGeom>
         </p:spPr>
-      </p:pic>
+        <p:txBody>
+          <a:bodyPr vert="horz" lIns="91440" tIns="45720" rIns="91440" bIns="45720" rtlCol="0">
+            <a:normAutofit/>
+          </a:bodyPr>
+          <a:lstStyle>
+            <a:lvl1pPr marL="228600" indent="-228600" algn="l" defTabSz="914400" rtl="0" eaLnBrk="1" latinLnBrk="0" hangingPunct="1">
+              <a:lnSpc>
+                <a:spcPct val="90000"/>
+              </a:lnSpc>
+              <a:spcBef>
+                <a:spcPts val="1000"/>
+              </a:spcBef>
+              <a:buFont typeface="Arial" panose="020B0604020202020204" pitchFamily="34" charset="0"/>
+              <a:buChar char="•"/>
+              <a:defRPr sz="2800" kern="1200">
+                <a:solidFill>
+                  <a:schemeClr val="tx1"/>
+                </a:solidFill>
+                <a:latin typeface="+mn-lt"/>
+                <a:ea typeface="+mn-ea"/>
+                <a:cs typeface="+mn-cs"/>
+              </a:defRPr>
+            </a:lvl1pPr>
+            <a:lvl2pPr marL="685800" indent="-228600" algn="l" defTabSz="914400" rtl="0" eaLnBrk="1" latinLnBrk="0" hangingPunct="1">
+              <a:lnSpc>
+                <a:spcPct val="90000"/>
+              </a:lnSpc>
+              <a:spcBef>
+                <a:spcPts val="500"/>
+              </a:spcBef>
+              <a:buFont typeface="Arial" panose="020B0604020202020204" pitchFamily="34" charset="0"/>
+              <a:buChar char="•"/>
+              <a:defRPr sz="2400" kern="1200">
+                <a:solidFill>
+                  <a:schemeClr val="tx1"/>
+                </a:solidFill>
+                <a:latin typeface="+mn-lt"/>
+                <a:ea typeface="+mn-ea"/>
+                <a:cs typeface="+mn-cs"/>
+              </a:defRPr>
+            </a:lvl2pPr>
+            <a:lvl3pPr marL="1143000" indent="-228600" algn="l" defTabSz="914400" rtl="0" eaLnBrk="1" latinLnBrk="0" hangingPunct="1">
+              <a:lnSpc>
+                <a:spcPct val="90000"/>
+              </a:lnSpc>
+              <a:spcBef>
+                <a:spcPts val="500"/>
+              </a:spcBef>
+              <a:buFont typeface="Arial" panose="020B0604020202020204" pitchFamily="34" charset="0"/>
+              <a:buChar char="•"/>
+              <a:defRPr sz="2000" kern="1200">
+                <a:solidFill>
+                  <a:schemeClr val="tx1"/>
+                </a:solidFill>
+                <a:latin typeface="+mn-lt"/>
+                <a:ea typeface="+mn-ea"/>
+                <a:cs typeface="+mn-cs"/>
+              </a:defRPr>
+            </a:lvl3pPr>
+            <a:lvl4pPr marL="1600200" indent="-228600" algn="l" defTabSz="914400" rtl="0" eaLnBrk="1" latinLnBrk="0" hangingPunct="1">
+              <a:lnSpc>
+                <a:spcPct val="90000"/>
+              </a:lnSpc>
+              <a:spcBef>
+                <a:spcPts val="500"/>
+              </a:spcBef>
+              <a:buFont typeface="Arial" panose="020B0604020202020204" pitchFamily="34" charset="0"/>
+              <a:buChar char="•"/>
+              <a:defRPr sz="1800" kern="1200">
+                <a:solidFill>
+                  <a:schemeClr val="tx1"/>
+                </a:solidFill>
+                <a:latin typeface="+mn-lt"/>
+                <a:ea typeface="+mn-ea"/>
+                <a:cs typeface="+mn-cs"/>
+              </a:defRPr>
+            </a:lvl4pPr>
+            <a:lvl5pPr marL="2057400" indent="-228600" algn="l" defTabSz="914400" rtl="0" eaLnBrk="1" latinLnBrk="0" hangingPunct="1">
+              <a:lnSpc>
+                <a:spcPct val="90000"/>
+              </a:lnSpc>
+              <a:spcBef>
+                <a:spcPts val="500"/>
+              </a:spcBef>
+              <a:buFont typeface="Arial" panose="020B0604020202020204" pitchFamily="34" charset="0"/>
+              <a:buChar char="•"/>
+              <a:defRPr sz="1800" kern="1200">
+                <a:solidFill>
+                  <a:schemeClr val="tx1"/>
+                </a:solidFill>
+                <a:latin typeface="+mn-lt"/>
+                <a:ea typeface="+mn-ea"/>
+                <a:cs typeface="+mn-cs"/>
+              </a:defRPr>
+            </a:lvl5pPr>
+            <a:lvl6pPr marL="2514600" indent="-228600" algn="l" defTabSz="914400" rtl="0" eaLnBrk="1" latinLnBrk="0" hangingPunct="1">
+              <a:lnSpc>
+                <a:spcPct val="90000"/>
+              </a:lnSpc>
+              <a:spcBef>
+                <a:spcPts val="500"/>
+              </a:spcBef>
+              <a:buFont typeface="Arial" panose="020B0604020202020204" pitchFamily="34" charset="0"/>
+              <a:buChar char="•"/>
+              <a:defRPr sz="1800" kern="1200">
+                <a:solidFill>
+                  <a:schemeClr val="tx1"/>
+                </a:solidFill>
+                <a:latin typeface="+mn-lt"/>
+                <a:ea typeface="+mn-ea"/>
+                <a:cs typeface="+mn-cs"/>
+              </a:defRPr>
+            </a:lvl6pPr>
+            <a:lvl7pPr marL="2971800" indent="-228600" algn="l" defTabSz="914400" rtl="0" eaLnBrk="1" latinLnBrk="0" hangingPunct="1">
+              <a:lnSpc>
+                <a:spcPct val="90000"/>
+              </a:lnSpc>
+              <a:spcBef>
+                <a:spcPts val="500"/>
+              </a:spcBef>
+              <a:buFont typeface="Arial" panose="020B0604020202020204" pitchFamily="34" charset="0"/>
+              <a:buChar char="•"/>
+              <a:defRPr sz="1800" kern="1200">
+                <a:solidFill>
+                  <a:schemeClr val="tx1"/>
+                </a:solidFill>
+                <a:latin typeface="+mn-lt"/>
+                <a:ea typeface="+mn-ea"/>
+                <a:cs typeface="+mn-cs"/>
+              </a:defRPr>
+            </a:lvl7pPr>
+            <a:lvl8pPr marL="3429000" indent="-228600" algn="l" defTabSz="914400" rtl="0" eaLnBrk="1" latinLnBrk="0" hangingPunct="1">
+              <a:lnSpc>
+                <a:spcPct val="90000"/>
+              </a:lnSpc>
+              <a:spcBef>
+                <a:spcPts val="500"/>
+              </a:spcBef>
+              <a:buFont typeface="Arial" panose="020B0604020202020204" pitchFamily="34" charset="0"/>
+              <a:buChar char="•"/>
+              <a:defRPr sz="1800" kern="1200">
+                <a:solidFill>
+                  <a:schemeClr val="tx1"/>
+                </a:solidFill>
+                <a:latin typeface="+mn-lt"/>
+                <a:ea typeface="+mn-ea"/>
+                <a:cs typeface="+mn-cs"/>
+              </a:defRPr>
+            </a:lvl8pPr>
+            <a:lvl9pPr marL="3886200" indent="-228600" algn="l" defTabSz="914400" rtl="0" eaLnBrk="1" latinLnBrk="0" hangingPunct="1">
+              <a:lnSpc>
+                <a:spcPct val="90000"/>
+              </a:lnSpc>
+              <a:spcBef>
+                <a:spcPts val="500"/>
+              </a:spcBef>
+              <a:buFont typeface="Arial" panose="020B0604020202020204" pitchFamily="34" charset="0"/>
+              <a:buChar char="•"/>
+              <a:defRPr sz="1800" kern="1200">
+                <a:solidFill>
+                  <a:schemeClr val="tx1"/>
+                </a:solidFill>
+                <a:latin typeface="+mn-lt"/>
+                <a:ea typeface="+mn-ea"/>
+                <a:cs typeface="+mn-cs"/>
+              </a:defRPr>
+            </a:lvl9pPr>
+          </a:lstStyle>
+          <a:p>
+            <a:pPr marL="0" indent="0">
+              <a:buFont typeface="Arial" panose="020B0604020202020204" pitchFamily="34" charset="0"/>
+              <a:buNone/>
+            </a:pPr>
+            <a:endParaRPr lang="it-IT" sz="2400" dirty="0"/>
+          </a:p>
+        </p:txBody>
+      </p:sp>
+      <p:sp>
+        <p:nvSpPr>
+          <p:cNvPr id="16" name="Content Placeholder 7">
+            <a:extLst>
+              <a:ext uri="{FF2B5EF4-FFF2-40B4-BE49-F238E27FC236}">
+                <a16:creationId xmlns:a16="http://schemas.microsoft.com/office/drawing/2014/main" id="{6D371AAE-7BE2-B660-AD0F-A6E64F1BB7E3}"/>
+              </a:ext>
+            </a:extLst>
+          </p:cNvPr>
+          <p:cNvSpPr txBox="1">
+            <a:spLocks/>
+          </p:cNvSpPr>
+          <p:nvPr/>
+        </p:nvSpPr>
+        <p:spPr>
+          <a:xfrm>
+            <a:off x="4432300" y="1464838"/>
+            <a:ext cx="7073900" cy="4864525"/>
+          </a:xfrm>
+          <a:prstGeom prst="rect">
+            <a:avLst/>
+          </a:prstGeom>
+        </p:spPr>
+        <p:txBody>
+          <a:bodyPr vert="horz" lIns="91440" tIns="45720" rIns="91440" bIns="45720" rtlCol="0">
+            <a:normAutofit/>
+          </a:bodyPr>
+          <a:lstStyle>
+            <a:lvl1pPr marL="228600" indent="-228600" algn="l" defTabSz="914400" rtl="0" eaLnBrk="1" latinLnBrk="0" hangingPunct="1">
+              <a:lnSpc>
+                <a:spcPct val="90000"/>
+              </a:lnSpc>
+              <a:spcBef>
+                <a:spcPts val="1000"/>
+              </a:spcBef>
+              <a:buFont typeface="Arial" panose="020B0604020202020204" pitchFamily="34" charset="0"/>
+              <a:buChar char="•"/>
+              <a:defRPr sz="2800" kern="1200">
+                <a:solidFill>
+                  <a:schemeClr val="tx1"/>
+                </a:solidFill>
+                <a:latin typeface="+mn-lt"/>
+                <a:ea typeface="+mn-ea"/>
+                <a:cs typeface="+mn-cs"/>
+              </a:defRPr>
+            </a:lvl1pPr>
+            <a:lvl2pPr marL="685800" indent="-228600" algn="l" defTabSz="914400" rtl="0" eaLnBrk="1" latinLnBrk="0" hangingPunct="1">
+              <a:lnSpc>
+                <a:spcPct val="90000"/>
+              </a:lnSpc>
+              <a:spcBef>
+                <a:spcPts val="500"/>
+              </a:spcBef>
+              <a:buFont typeface="Arial" panose="020B0604020202020204" pitchFamily="34" charset="0"/>
+              <a:buChar char="•"/>
+              <a:defRPr sz="2400" kern="1200">
+                <a:solidFill>
+                  <a:schemeClr val="tx1"/>
+                </a:solidFill>
+                <a:latin typeface="+mn-lt"/>
+                <a:ea typeface="+mn-ea"/>
+                <a:cs typeface="+mn-cs"/>
+              </a:defRPr>
+            </a:lvl2pPr>
+            <a:lvl3pPr marL="1143000" indent="-228600" algn="l" defTabSz="914400" rtl="0" eaLnBrk="1" latinLnBrk="0" hangingPunct="1">
+              <a:lnSpc>
+                <a:spcPct val="90000"/>
+              </a:lnSpc>
+              <a:spcBef>
+                <a:spcPts val="500"/>
+              </a:spcBef>
+              <a:buFont typeface="Arial" panose="020B0604020202020204" pitchFamily="34" charset="0"/>
+              <a:buChar char="•"/>
+              <a:defRPr sz="2000" kern="1200">
+                <a:solidFill>
+                  <a:schemeClr val="tx1"/>
+                </a:solidFill>
+                <a:latin typeface="+mn-lt"/>
+                <a:ea typeface="+mn-ea"/>
+                <a:cs typeface="+mn-cs"/>
+              </a:defRPr>
+            </a:lvl3pPr>
+            <a:lvl4pPr marL="1600200" indent="-228600" algn="l" defTabSz="914400" rtl="0" eaLnBrk="1" latinLnBrk="0" hangingPunct="1">
+              <a:lnSpc>
+                <a:spcPct val="90000"/>
+              </a:lnSpc>
+              <a:spcBef>
+                <a:spcPts val="500"/>
+              </a:spcBef>
+              <a:buFont typeface="Arial" panose="020B0604020202020204" pitchFamily="34" charset="0"/>
+              <a:buChar char="•"/>
+              <a:defRPr sz="1800" kern="1200">
+                <a:solidFill>
+                  <a:schemeClr val="tx1"/>
+                </a:solidFill>
+                <a:latin typeface="+mn-lt"/>
+                <a:ea typeface="+mn-ea"/>
+                <a:cs typeface="+mn-cs"/>
+              </a:defRPr>
+            </a:lvl4pPr>
+            <a:lvl5pPr marL="2057400" indent="-228600" algn="l" defTabSz="914400" rtl="0" eaLnBrk="1" latinLnBrk="0" hangingPunct="1">
+              <a:lnSpc>
+                <a:spcPct val="90000"/>
+              </a:lnSpc>
+              <a:spcBef>
+                <a:spcPts val="500"/>
+              </a:spcBef>
+              <a:buFont typeface="Arial" panose="020B0604020202020204" pitchFamily="34" charset="0"/>
+              <a:buChar char="•"/>
+              <a:defRPr sz="1800" kern="1200">
+                <a:solidFill>
+                  <a:schemeClr val="tx1"/>
+                </a:solidFill>
+                <a:latin typeface="+mn-lt"/>
+                <a:ea typeface="+mn-ea"/>
+                <a:cs typeface="+mn-cs"/>
+              </a:defRPr>
+            </a:lvl5pPr>
+            <a:lvl6pPr marL="2514600" indent="-228600" algn="l" defTabSz="914400" rtl="0" eaLnBrk="1" latinLnBrk="0" hangingPunct="1">
+              <a:lnSpc>
+                <a:spcPct val="90000"/>
+              </a:lnSpc>
+              <a:spcBef>
+                <a:spcPts val="500"/>
+              </a:spcBef>
+              <a:buFont typeface="Arial" panose="020B0604020202020204" pitchFamily="34" charset="0"/>
+              <a:buChar char="•"/>
+              <a:defRPr sz="1800" kern="1200">
+                <a:solidFill>
+                  <a:schemeClr val="tx1"/>
+                </a:solidFill>
+                <a:latin typeface="+mn-lt"/>
+                <a:ea typeface="+mn-ea"/>
+                <a:cs typeface="+mn-cs"/>
+              </a:defRPr>
+            </a:lvl6pPr>
+            <a:lvl7pPr marL="2971800" indent="-228600" algn="l" defTabSz="914400" rtl="0" eaLnBrk="1" latinLnBrk="0" hangingPunct="1">
+              <a:lnSpc>
+                <a:spcPct val="90000"/>
+              </a:lnSpc>
+              <a:spcBef>
+                <a:spcPts val="500"/>
+              </a:spcBef>
+              <a:buFont typeface="Arial" panose="020B0604020202020204" pitchFamily="34" charset="0"/>
+              <a:buChar char="•"/>
+              <a:defRPr sz="1800" kern="1200">
+                <a:solidFill>
+                  <a:schemeClr val="tx1"/>
+                </a:solidFill>
+                <a:latin typeface="+mn-lt"/>
+                <a:ea typeface="+mn-ea"/>
+                <a:cs typeface="+mn-cs"/>
+              </a:defRPr>
+            </a:lvl7pPr>
+            <a:lvl8pPr marL="3429000" indent="-228600" algn="l" defTabSz="914400" rtl="0" eaLnBrk="1" latinLnBrk="0" hangingPunct="1">
+              <a:lnSpc>
+                <a:spcPct val="90000"/>
+              </a:lnSpc>
+              <a:spcBef>
+                <a:spcPts val="500"/>
+              </a:spcBef>
+              <a:buFont typeface="Arial" panose="020B0604020202020204" pitchFamily="34" charset="0"/>
+              <a:buChar char="•"/>
+              <a:defRPr sz="1800" kern="1200">
+                <a:solidFill>
+                  <a:schemeClr val="tx1"/>
+                </a:solidFill>
+                <a:latin typeface="+mn-lt"/>
+                <a:ea typeface="+mn-ea"/>
+                <a:cs typeface="+mn-cs"/>
+              </a:defRPr>
+            </a:lvl8pPr>
+            <a:lvl9pPr marL="3886200" indent="-228600" algn="l" defTabSz="914400" rtl="0" eaLnBrk="1" latinLnBrk="0" hangingPunct="1">
+              <a:lnSpc>
+                <a:spcPct val="90000"/>
+              </a:lnSpc>
+              <a:spcBef>
+                <a:spcPts val="500"/>
+              </a:spcBef>
+              <a:buFont typeface="Arial" panose="020B0604020202020204" pitchFamily="34" charset="0"/>
+              <a:buChar char="•"/>
+              <a:defRPr sz="1800" kern="1200">
+                <a:solidFill>
+                  <a:schemeClr val="tx1"/>
+                </a:solidFill>
+                <a:latin typeface="+mn-lt"/>
+                <a:ea typeface="+mn-ea"/>
+                <a:cs typeface="+mn-cs"/>
+              </a:defRPr>
+            </a:lvl9pPr>
+          </a:lstStyle>
+          <a:p>
+            <a:pPr marL="0" indent="0">
+              <a:buFont typeface="Arial" panose="020B0604020202020204" pitchFamily="34" charset="0"/>
+              <a:buNone/>
+            </a:pPr>
+            <a:endParaRPr lang="it-IT" sz="2400" dirty="0"/>
+          </a:p>
+        </p:txBody>
+      </p:sp>
       <mc:AlternateContent xmlns:mc="http://schemas.openxmlformats.org/markup-compatibility/2006">
         <mc:Choice xmlns:a14="http://schemas.microsoft.com/office/drawing/2010/main" Requires="a14">
           <p:sp>
             <p:nvSpPr>
-              <p:cNvPr id="9" name="Content Placeholder 7">
+              <p:cNvPr id="18" name="Rectangle: Rounded Corners 17">
                 <a:extLst>
                   <a:ext uri="{FF2B5EF4-FFF2-40B4-BE49-F238E27FC236}">
-                    <a16:creationId xmlns:a16="http://schemas.microsoft.com/office/drawing/2014/main" id="{B4BC83D3-748A-A91A-0C8B-2D2C2930A9ED}"/>
+                    <a16:creationId xmlns:a16="http://schemas.microsoft.com/office/drawing/2014/main" id="{7478AB32-9E05-CFAB-1AE2-354E439F5D14}"/>
                   </a:ext>
                 </a:extLst>
               </p:cNvPr>
-              <p:cNvSpPr txBox="1">
-                <a:spLocks/>
-              </p:cNvSpPr>
+              <p:cNvSpPr/>
               <p:nvPr/>
             </p:nvSpPr>
             <p:spPr>
               <a:xfrm>
-                <a:off x="4279900" y="1312438"/>
-                <a:ext cx="7073900" cy="4864525"/>
+                <a:off x="4104640" y="1375144"/>
+                <a:ext cx="7391360" cy="1032775"/>
               </a:xfrm>
-              <a:prstGeom prst="rect">
-                <a:avLst/>
+              <a:prstGeom prst="roundRect">
+                <a:avLst>
+                  <a:gd name="adj" fmla="val 0"/>
+                </a:avLst>
               </a:prstGeom>
+              <a:solidFill>
+                <a:schemeClr val="bg1"/>
+              </a:solidFill>
+              <a:ln w="38100">
+                <a:solidFill>
+                  <a:srgbClr val="92D050"/>
+                </a:solidFill>
+              </a:ln>
             </p:spPr>
+            <p:style>
+              <a:lnRef idx="2">
+                <a:schemeClr val="accent1">
+                  <a:shade val="15000"/>
+                </a:schemeClr>
+              </a:lnRef>
+              <a:fillRef idx="1">
+                <a:schemeClr val="accent1"/>
+              </a:fillRef>
+              <a:effectRef idx="0">
+                <a:schemeClr val="accent1"/>
+              </a:effectRef>
+              <a:fontRef idx="minor">
+                <a:schemeClr val="lt1"/>
+              </a:fontRef>
+            </p:style>
             <p:txBody>
-              <a:bodyPr vert="horz" lIns="91440" tIns="45720" rIns="91440" bIns="45720" rtlCol="0">
-                <a:normAutofit/>
-              </a:bodyPr>
-              <a:lstStyle>
-                <a:lvl1pPr marL="228600" indent="-228600" algn="l" defTabSz="914400" rtl="0" eaLnBrk="1" latinLnBrk="0" hangingPunct="1">
-                  <a:lnSpc>
-                    <a:spcPct val="90000"/>
-                  </a:lnSpc>
-                  <a:spcBef>
-                    <a:spcPts val="1000"/>
-                  </a:spcBef>
-                  <a:buFont typeface="Arial" panose="020B0604020202020204" pitchFamily="34" charset="0"/>
-                  <a:buChar char="•"/>
-                  <a:defRPr sz="2800" kern="1200">
+              <a:bodyPr rtlCol="0" anchor="ctr"/>
+              <a:lstStyle/>
+              <a:p>
+                <a:pPr algn="ctr"/>
+                <a:r>
+                  <a:rPr lang="en-US" sz="2000" dirty="0">
                     <a:solidFill>
                       <a:schemeClr val="tx1"/>
                     </a:solidFill>
-                    <a:latin typeface="+mn-lt"/>
-                    <a:ea typeface="+mn-ea"/>
-                    <a:cs typeface="+mn-cs"/>
-                  </a:defRPr>
-                </a:lvl1pPr>
-                <a:lvl2pPr marL="685800" indent="-228600" algn="l" defTabSz="914400" rtl="0" eaLnBrk="1" latinLnBrk="0" hangingPunct="1">
-                  <a:lnSpc>
-                    <a:spcPct val="90000"/>
-                  </a:lnSpc>
-                  <a:spcBef>
-                    <a:spcPts val="500"/>
-                  </a:spcBef>
-                  <a:buFont typeface="Arial" panose="020B0604020202020204" pitchFamily="34" charset="0"/>
-                  <a:buChar char="•"/>
-                  <a:defRPr sz="2400" kern="1200">
+                  </a:rPr>
+                  <a:t>Selecting particles that entered in the crystal:</a:t>
+                </a:r>
+              </a:p>
+              <a:p>
+                <a:pPr algn="ctr"/>
+                <a:r>
+                  <a:rPr lang="en-US" sz="2000" dirty="0">
                     <a:solidFill>
                       <a:schemeClr val="tx1"/>
                     </a:solidFill>
-                    <a:latin typeface="+mn-lt"/>
-                    <a:ea typeface="+mn-ea"/>
-                    <a:cs typeface="+mn-cs"/>
-                  </a:defRPr>
-                </a:lvl2pPr>
-                <a:lvl3pPr marL="1143000" indent="-228600" algn="l" defTabSz="914400" rtl="0" eaLnBrk="1" latinLnBrk="0" hangingPunct="1">
-                  <a:lnSpc>
-                    <a:spcPct val="90000"/>
-                  </a:lnSpc>
-                  <a:spcBef>
-                    <a:spcPts val="500"/>
-                  </a:spcBef>
-                  <a:buFont typeface="Arial" panose="020B0604020202020204" pitchFamily="34" charset="0"/>
-                  <a:buChar char="•"/>
-                  <a:defRPr sz="2000" kern="1200">
-                    <a:solidFill>
-                      <a:schemeClr val="tx1"/>
-                    </a:solidFill>
-                    <a:latin typeface="+mn-lt"/>
-                    <a:ea typeface="+mn-ea"/>
-                    <a:cs typeface="+mn-cs"/>
-                  </a:defRPr>
-                </a:lvl3pPr>
-                <a:lvl4pPr marL="1600200" indent="-228600" algn="l" defTabSz="914400" rtl="0" eaLnBrk="1" latinLnBrk="0" hangingPunct="1">
-                  <a:lnSpc>
-                    <a:spcPct val="90000"/>
-                  </a:lnSpc>
-                  <a:spcBef>
-                    <a:spcPts val="500"/>
-                  </a:spcBef>
-                  <a:buFont typeface="Arial" panose="020B0604020202020204" pitchFamily="34" charset="0"/>
-                  <a:buChar char="•"/>
-                  <a:defRPr sz="1800" kern="1200">
-                    <a:solidFill>
-                      <a:schemeClr val="tx1"/>
-                    </a:solidFill>
-                    <a:latin typeface="+mn-lt"/>
-                    <a:ea typeface="+mn-ea"/>
-                    <a:cs typeface="+mn-cs"/>
-                  </a:defRPr>
-                </a:lvl4pPr>
-                <a:lvl5pPr marL="2057400" indent="-228600" algn="l" defTabSz="914400" rtl="0" eaLnBrk="1" latinLnBrk="0" hangingPunct="1">
-                  <a:lnSpc>
-                    <a:spcPct val="90000"/>
-                  </a:lnSpc>
-                  <a:spcBef>
-                    <a:spcPts val="500"/>
-                  </a:spcBef>
-                  <a:buFont typeface="Arial" panose="020B0604020202020204" pitchFamily="34" charset="0"/>
-                  <a:buChar char="•"/>
-                  <a:defRPr sz="1800" kern="1200">
-                    <a:solidFill>
-                      <a:schemeClr val="tx1"/>
-                    </a:solidFill>
-                    <a:latin typeface="+mn-lt"/>
-                    <a:ea typeface="+mn-ea"/>
-                    <a:cs typeface="+mn-cs"/>
-                  </a:defRPr>
-                </a:lvl5pPr>
-                <a:lvl6pPr marL="2514600" indent="-228600" algn="l" defTabSz="914400" rtl="0" eaLnBrk="1" latinLnBrk="0" hangingPunct="1">
-                  <a:lnSpc>
-                    <a:spcPct val="90000"/>
-                  </a:lnSpc>
-                  <a:spcBef>
-                    <a:spcPts val="500"/>
-                  </a:spcBef>
-                  <a:buFont typeface="Arial" panose="020B0604020202020204" pitchFamily="34" charset="0"/>
-                  <a:buChar char="•"/>
-                  <a:defRPr sz="1800" kern="1200">
-                    <a:solidFill>
-                      <a:schemeClr val="tx1"/>
-                    </a:solidFill>
-                    <a:latin typeface="+mn-lt"/>
-                    <a:ea typeface="+mn-ea"/>
-                    <a:cs typeface="+mn-cs"/>
-                  </a:defRPr>
-                </a:lvl6pPr>
-                <a:lvl7pPr marL="2971800" indent="-228600" algn="l" defTabSz="914400" rtl="0" eaLnBrk="1" latinLnBrk="0" hangingPunct="1">
-                  <a:lnSpc>
-                    <a:spcPct val="90000"/>
-                  </a:lnSpc>
-                  <a:spcBef>
-                    <a:spcPts val="500"/>
-                  </a:spcBef>
-                  <a:buFont typeface="Arial" panose="020B0604020202020204" pitchFamily="34" charset="0"/>
-                  <a:buChar char="•"/>
-                  <a:defRPr sz="1800" kern="1200">
-                    <a:solidFill>
-                      <a:schemeClr val="tx1"/>
-                    </a:solidFill>
-                    <a:latin typeface="+mn-lt"/>
-                    <a:ea typeface="+mn-ea"/>
-                    <a:cs typeface="+mn-cs"/>
-                  </a:defRPr>
-                </a:lvl7pPr>
-                <a:lvl8pPr marL="3429000" indent="-228600" algn="l" defTabSz="914400" rtl="0" eaLnBrk="1" latinLnBrk="0" hangingPunct="1">
-                  <a:lnSpc>
-                    <a:spcPct val="90000"/>
-                  </a:lnSpc>
-                  <a:spcBef>
-                    <a:spcPts val="500"/>
-                  </a:spcBef>
-                  <a:buFont typeface="Arial" panose="020B0604020202020204" pitchFamily="34" charset="0"/>
-                  <a:buChar char="•"/>
-                  <a:defRPr sz="1800" kern="1200">
-                    <a:solidFill>
-                      <a:schemeClr val="tx1"/>
-                    </a:solidFill>
-                    <a:latin typeface="+mn-lt"/>
-                    <a:ea typeface="+mn-ea"/>
-                    <a:cs typeface="+mn-cs"/>
-                  </a:defRPr>
-                </a:lvl8pPr>
-                <a:lvl9pPr marL="3886200" indent="-228600" algn="l" defTabSz="914400" rtl="0" eaLnBrk="1" latinLnBrk="0" hangingPunct="1">
-                  <a:lnSpc>
-                    <a:spcPct val="90000"/>
-                  </a:lnSpc>
-                  <a:spcBef>
-                    <a:spcPts val="500"/>
-                  </a:spcBef>
-                  <a:buFont typeface="Arial" panose="020B0604020202020204" pitchFamily="34" charset="0"/>
-                  <a:buChar char="•"/>
-                  <a:defRPr sz="1800" kern="1200">
-                    <a:solidFill>
-                      <a:schemeClr val="tx1"/>
-                    </a:solidFill>
-                    <a:latin typeface="+mn-lt"/>
-                    <a:ea typeface="+mn-ea"/>
-                    <a:cs typeface="+mn-cs"/>
-                  </a:defRPr>
-                </a:lvl9pPr>
-              </a:lstStyle>
-              <a:p>
-                <a:pPr marL="0" indent="0">
-                  <a:buFont typeface="Arial" panose="020B0604020202020204" pitchFamily="34" charset="0"/>
-                  <a:buNone/>
-                </a:pPr>
-                <a:r>
-                  <a:rPr lang="it-IT" sz="2400" dirty="0"/>
-                  <a:t>Out of 200k particles only </a:t>
+                  </a:rPr>
+                  <a:t>compatible with theoretical expectation </a:t>
                 </a:r>
                 <a14:m>
                   <m:oMath xmlns:m="http://schemas.openxmlformats.org/officeDocument/2006/math">
                     <m:r>
-                      <a:rPr lang="it-IT" sz="2400" b="0" i="1" smtClean="0">
+                      <a:rPr lang="it-IT" sz="2000" b="0" i="1" smtClean="0">
+                        <a:solidFill>
+                          <a:schemeClr val="tx1"/>
+                        </a:solidFill>
                         <a:latin typeface="Cambria Math" panose="02040503050406030204" pitchFamily="18" charset="0"/>
                       </a:rPr>
-                      <m:t>∼</m:t>
+                      <m:t>𝑓</m:t>
+                    </m:r>
+                    <m:r>
+                      <a:rPr lang="it-IT" sz="2000" b="0" i="1" smtClean="0">
+                        <a:solidFill>
+                          <a:schemeClr val="tx1"/>
+                        </a:solidFill>
+                        <a:latin typeface="Cambria Math" panose="02040503050406030204" pitchFamily="18" charset="0"/>
+                      </a:rPr>
+                      <m:t>=</m:t>
+                    </m:r>
+                    <m:func>
+                      <m:funcPr>
+                        <m:ctrlPr>
+                          <a:rPr lang="it-IT" sz="2000" b="0" i="0" smtClean="0">
+                            <a:solidFill>
+                              <a:schemeClr val="tx1"/>
+                            </a:solidFill>
+                            <a:latin typeface="Cambria Math" panose="02040503050406030204" pitchFamily="18" charset="0"/>
+                          </a:rPr>
+                        </m:ctrlPr>
+                      </m:funcPr>
+                      <m:fName>
+                        <m:r>
+                          <m:rPr>
+                            <m:sty m:val="p"/>
+                          </m:rPr>
+                          <a:rPr lang="it-IT" sz="2000" b="0" i="0" smtClean="0">
+                            <a:solidFill>
+                              <a:schemeClr val="tx1"/>
+                            </a:solidFill>
+                            <a:latin typeface="Cambria Math" panose="02040503050406030204" pitchFamily="18" charset="0"/>
+                          </a:rPr>
+                          <m:t>erf</m:t>
+                        </m:r>
+                      </m:fName>
+                      <m:e>
+                        <m:d>
+                          <m:dPr>
+                            <m:ctrlPr>
+                              <a:rPr lang="it-IT" sz="2000" b="0" i="1" smtClean="0">
+                                <a:solidFill>
+                                  <a:schemeClr val="tx1"/>
+                                </a:solidFill>
+                                <a:latin typeface="Cambria Math" panose="02040503050406030204" pitchFamily="18" charset="0"/>
+                              </a:rPr>
+                            </m:ctrlPr>
+                          </m:dPr>
+                          <m:e>
+                            <m:f>
+                              <m:fPr>
+                                <m:ctrlPr>
+                                  <a:rPr lang="it-IT" sz="2000" b="0" i="1" smtClean="0">
+                                    <a:solidFill>
+                                      <a:schemeClr val="tx1"/>
+                                    </a:solidFill>
+                                    <a:latin typeface="Cambria Math" panose="02040503050406030204" pitchFamily="18" charset="0"/>
+                                  </a:rPr>
+                                </m:ctrlPr>
+                              </m:fPr>
+                              <m:num>
+                                <m:r>
+                                  <a:rPr lang="it-IT" sz="2000" b="0" i="1" smtClean="0">
+                                    <a:solidFill>
+                                      <a:schemeClr val="tx1"/>
+                                    </a:solidFill>
+                                    <a:latin typeface="Cambria Math" panose="02040503050406030204" pitchFamily="18" charset="0"/>
+                                  </a:rPr>
+                                  <m:t>1</m:t>
+                                </m:r>
+                              </m:num>
+                              <m:den>
+                                <m:sSub>
+                                  <m:sSubPr>
+                                    <m:ctrlPr>
+                                      <a:rPr lang="it-IT" sz="2000" b="0" i="1" smtClean="0">
+                                        <a:solidFill>
+                                          <a:schemeClr val="tx1"/>
+                                        </a:solidFill>
+                                        <a:latin typeface="Cambria Math" panose="02040503050406030204" pitchFamily="18" charset="0"/>
+                                      </a:rPr>
+                                    </m:ctrlPr>
+                                  </m:sSubPr>
+                                  <m:e>
+                                    <m:r>
+                                      <a:rPr lang="it-IT" sz="2000" b="0" i="1" smtClean="0">
+                                        <a:solidFill>
+                                          <a:schemeClr val="tx1"/>
+                                        </a:solidFill>
+                                        <a:latin typeface="Cambria Math" panose="02040503050406030204" pitchFamily="18" charset="0"/>
+                                      </a:rPr>
+                                      <m:t>𝜎</m:t>
+                                    </m:r>
+                                  </m:e>
+                                  <m:sub>
+                                    <m:r>
+                                      <a:rPr lang="it-IT" sz="2000" b="0" i="1" smtClean="0">
+                                        <a:solidFill>
+                                          <a:schemeClr val="tx1"/>
+                                        </a:solidFill>
+                                        <a:latin typeface="Cambria Math" panose="02040503050406030204" pitchFamily="18" charset="0"/>
+                                      </a:rPr>
+                                      <m:t>𝑥</m:t>
+                                    </m:r>
+                                  </m:sub>
+                                </m:sSub>
+                                <m:rad>
+                                  <m:radPr>
+                                    <m:degHide m:val="on"/>
+                                    <m:ctrlPr>
+                                      <a:rPr lang="it-IT" sz="2000" b="0" i="1" smtClean="0">
+                                        <a:solidFill>
+                                          <a:schemeClr val="tx1"/>
+                                        </a:solidFill>
+                                        <a:latin typeface="Cambria Math" panose="02040503050406030204" pitchFamily="18" charset="0"/>
+                                      </a:rPr>
+                                    </m:ctrlPr>
+                                  </m:radPr>
+                                  <m:deg/>
+                                  <m:e>
+                                    <m:r>
+                                      <a:rPr lang="it-IT" sz="2000" b="0" i="1" smtClean="0">
+                                        <a:solidFill>
+                                          <a:schemeClr val="tx1"/>
+                                        </a:solidFill>
+                                        <a:latin typeface="Cambria Math" panose="02040503050406030204" pitchFamily="18" charset="0"/>
+                                      </a:rPr>
+                                      <m:t>2</m:t>
+                                    </m:r>
+                                  </m:e>
+                                </m:rad>
+                              </m:den>
+                            </m:f>
+                          </m:e>
+                        </m:d>
+                      </m:e>
+                    </m:func>
+                    <m:r>
+                      <a:rPr lang="it-IT" sz="2000" b="0" i="1" smtClean="0">
+                        <a:solidFill>
+                          <a:schemeClr val="tx1"/>
+                        </a:solidFill>
+                        <a:latin typeface="Cambria Math" panose="02040503050406030204" pitchFamily="18" charset="0"/>
+                      </a:rPr>
+                      <m:t>=92%</m:t>
                     </m:r>
                   </m:oMath>
                 </a14:m>
-                <a:r>
-                  <a:rPr lang="it-IT" sz="2400" dirty="0"/>
-                  <a:t>650 are surviving</a:t>
-                </a:r>
-              </a:p>
-              <a:p>
-                <a:pPr marL="0" indent="0">
-                  <a:buFont typeface="Arial" panose="020B0604020202020204" pitchFamily="34" charset="0"/>
-                  <a:buNone/>
-                </a:pPr>
-                <a:r>
-                  <a:rPr lang="it-IT" sz="2400" dirty="0"/>
-                  <a:t>But with </a:t>
-                </a:r>
-                <a14:m>
-                  <m:oMath xmlns:m="http://schemas.openxmlformats.org/officeDocument/2006/math">
-                    <m:sSub>
-                      <m:sSubPr>
-                        <m:ctrlPr>
-                          <a:rPr lang="it-IT" sz="2400" b="0" i="1" smtClean="0">
-                            <a:latin typeface="Cambria Math" panose="02040503050406030204" pitchFamily="18" charset="0"/>
-                          </a:rPr>
-                        </m:ctrlPr>
-                      </m:sSubPr>
-                      <m:e>
-                        <m:r>
-                          <a:rPr lang="it-IT" sz="2400" b="0" i="1" smtClean="0">
-                            <a:latin typeface="Cambria Math" panose="02040503050406030204" pitchFamily="18" charset="0"/>
-                          </a:rPr>
-                          <m:t>𝜎</m:t>
-                        </m:r>
-                      </m:e>
-                      <m:sub>
-                        <m:r>
-                          <a:rPr lang="it-IT" sz="2400" b="0" i="1" smtClean="0">
-                            <a:latin typeface="Cambria Math" panose="02040503050406030204" pitchFamily="18" charset="0"/>
-                          </a:rPr>
-                          <m:t>𝑥</m:t>
-                        </m:r>
-                      </m:sub>
-                    </m:sSub>
-                    <m:r>
-                      <a:rPr lang="it-IT" sz="2400" b="0" i="1" smtClean="0">
-                        <a:latin typeface="Cambria Math" panose="02040503050406030204" pitchFamily="18" charset="0"/>
-                      </a:rPr>
-                      <m:t>=0.568 </m:t>
-                    </m:r>
-                    <m:r>
-                      <m:rPr>
-                        <m:sty m:val="p"/>
-                      </m:rPr>
-                      <a:rPr lang="it-IT" sz="2400" b="0" i="0" smtClean="0">
-                        <a:latin typeface="Cambria Math" panose="02040503050406030204" pitchFamily="18" charset="0"/>
-                      </a:rPr>
-                      <m:t>mm</m:t>
-                    </m:r>
-                  </m:oMath>
-                </a14:m>
-                <a:r>
-                  <a:rPr lang="it-IT" sz="2400" dirty="0"/>
-                  <a:t> and the crystal with </a:t>
-                </a:r>
-                <a14:m>
-                  <m:oMath xmlns:m="http://schemas.openxmlformats.org/officeDocument/2006/math">
-                    <m:r>
-                      <a:rPr lang="it-IT" sz="2400" i="1" dirty="0" smtClean="0">
-                        <a:latin typeface="Cambria Math" panose="02040503050406030204" pitchFamily="18" charset="0"/>
-                      </a:rPr>
-                      <m:t>1 </m:t>
-                    </m:r>
-                    <m:r>
-                      <m:rPr>
-                        <m:sty m:val="p"/>
-                      </m:rPr>
-                      <a:rPr lang="it-IT" sz="2400" i="0" dirty="0" smtClean="0">
-                        <a:latin typeface="Cambria Math" panose="02040503050406030204" pitchFamily="18" charset="0"/>
-                      </a:rPr>
-                      <m:t>mm</m:t>
-                    </m:r>
-                    <m:r>
-                      <a:rPr lang="it-IT" sz="2400" i="0" dirty="0" smtClean="0">
-                        <a:latin typeface="Cambria Math" panose="02040503050406030204" pitchFamily="18" charset="0"/>
-                      </a:rPr>
-                      <m:t> </m:t>
-                    </m:r>
-                  </m:oMath>
-                </a14:m>
-                <a:r>
-                  <a:rPr lang="it-IT" sz="2400" dirty="0"/>
-                  <a:t>width, the fraction that should hit the crystal is 92%.</a:t>
-                </a:r>
-              </a:p>
-              <a:p>
-                <a:pPr marL="0" indent="0">
-                  <a:buFont typeface="Arial" panose="020B0604020202020204" pitchFamily="34" charset="0"/>
-                  <a:buNone/>
-                </a:pPr>
-                <a:endParaRPr lang="it-IT" sz="2400" dirty="0"/>
-              </a:p>
-              <a:p>
-                <a:pPr marL="0" indent="0">
-                  <a:buFont typeface="Arial" panose="020B0604020202020204" pitchFamily="34" charset="0"/>
-                  <a:buNone/>
-                </a:pPr>
-                <a:r>
-                  <a:rPr lang="it-IT" sz="2400" dirty="0"/>
-                  <a:t>Possible problems?</a:t>
-                </a:r>
-              </a:p>
-              <a:p>
-                <a:r>
-                  <a:rPr lang="it-IT" sz="2400" dirty="0"/>
-                  <a:t>Analysing the impact position that the lost particles would have had, they would have both been outside or inside the crystal (they are getting lost also if they would have travel through air)</a:t>
-                </a:r>
-              </a:p>
-              <a:p>
-                <a:r>
-                  <a:rPr lang="it-IT" sz="2400" dirty="0"/>
-                  <a:t>Aperture values, energy cut, ...</a:t>
-                </a:r>
+                <a:endParaRPr lang="it-IT" sz="2000" dirty="0">
+                  <a:solidFill>
+                    <a:schemeClr val="tx1"/>
+                  </a:solidFill>
+                </a:endParaRPr>
               </a:p>
             </p:txBody>
           </p:sp>
@@ -8884,32 +9148,618 @@
         <mc:Fallback>
           <p:sp>
             <p:nvSpPr>
-              <p:cNvPr id="9" name="Content Placeholder 7">
+              <p:cNvPr id="18" name="Rectangle: Rounded Corners 17">
                 <a:extLst>
                   <a:ext uri="{FF2B5EF4-FFF2-40B4-BE49-F238E27FC236}">
-                    <a16:creationId xmlns:a16="http://schemas.microsoft.com/office/drawing/2014/main" id="{B4BC83D3-748A-A91A-0C8B-2D2C2930A9ED}"/>
+                    <a16:creationId xmlns:a16="http://schemas.microsoft.com/office/drawing/2014/main" id="{7478AB32-9E05-CFAB-1AE2-354E439F5D14}"/>
                   </a:ext>
                 </a:extLst>
               </p:cNvPr>
-              <p:cNvSpPr txBox="1">
+              <p:cNvSpPr>
                 <a:spLocks noRot="1" noChangeAspect="1" noMove="1" noResize="1" noEditPoints="1" noAdjustHandles="1" noChangeArrowheads="1" noChangeShapeType="1" noTextEdit="1"/>
               </p:cNvSpPr>
               <p:nvPr/>
             </p:nvSpPr>
             <p:spPr>
               <a:xfrm>
-                <a:off x="4279900" y="1312438"/>
-                <a:ext cx="7073900" cy="4864525"/>
+                <a:off x="4104640" y="1375144"/>
+                <a:ext cx="7391360" cy="1032775"/>
               </a:xfrm>
-              <a:prstGeom prst="rect">
-                <a:avLst/>
+              <a:prstGeom prst="roundRect">
+                <a:avLst>
+                  <a:gd name="adj" fmla="val 0"/>
+                </a:avLst>
+              </a:prstGeom>
+              <a:blipFill>
+                <a:blip r:embed="rId3"/>
+                <a:stretch>
+                  <a:fillRect/>
+                </a:stretch>
+              </a:blipFill>
+              <a:ln w="38100">
+                <a:solidFill>
+                  <a:srgbClr val="92D050"/>
+                </a:solidFill>
+              </a:ln>
+            </p:spPr>
+            <p:txBody>
+              <a:bodyPr/>
+              <a:lstStyle/>
+              <a:p>
+                <a:r>
+                  <a:rPr lang="it-IT">
+                    <a:noFill/>
+                  </a:rPr>
+                  <a:t> </a:t>
+                </a:r>
+              </a:p>
+            </p:txBody>
+          </p:sp>
+        </mc:Fallback>
+      </mc:AlternateContent>
+      <mc:AlternateContent xmlns:mc="http://schemas.openxmlformats.org/markup-compatibility/2006">
+        <mc:Choice xmlns:a14="http://schemas.microsoft.com/office/drawing/2010/main" Requires="a14">
+          <p:sp>
+            <p:nvSpPr>
+              <p:cNvPr id="20" name="Rectangle: Rounded Corners 19">
+                <a:extLst>
+                  <a:ext uri="{FF2B5EF4-FFF2-40B4-BE49-F238E27FC236}">
+                    <a16:creationId xmlns:a16="http://schemas.microsoft.com/office/drawing/2014/main" id="{48C86449-AC7F-22CC-FD5A-F63BAD3BFD56}"/>
+                  </a:ext>
+                </a:extLst>
+              </p:cNvPr>
+              <p:cNvSpPr/>
+              <p:nvPr/>
+            </p:nvSpPr>
+            <p:spPr>
+              <a:xfrm>
+                <a:off x="4104640" y="2535726"/>
+                <a:ext cx="7391360" cy="1032775"/>
+              </a:xfrm>
+              <a:prstGeom prst="roundRect">
+                <a:avLst>
+                  <a:gd name="adj" fmla="val 0"/>
+                </a:avLst>
+              </a:prstGeom>
+              <a:solidFill>
+                <a:schemeClr val="bg1"/>
+              </a:solidFill>
+              <a:ln w="38100">
+                <a:solidFill>
+                  <a:srgbClr val="92D050"/>
+                </a:solidFill>
+              </a:ln>
+            </p:spPr>
+            <p:style>
+              <a:lnRef idx="2">
+                <a:schemeClr val="accent1">
+                  <a:shade val="15000"/>
+                </a:schemeClr>
+              </a:lnRef>
+              <a:fillRef idx="1">
+                <a:schemeClr val="accent1"/>
+              </a:fillRef>
+              <a:effectRef idx="0">
+                <a:schemeClr val="accent1"/>
+              </a:effectRef>
+              <a:fontRef idx="minor">
+                <a:schemeClr val="lt1"/>
+              </a:fontRef>
+            </p:style>
+            <p:txBody>
+              <a:bodyPr rtlCol="0" anchor="ctr"/>
+              <a:lstStyle/>
+              <a:p>
+                <a:pPr algn="ctr"/>
+                <a:r>
+                  <a:rPr lang="en-US" sz="2000" dirty="0">
+                    <a:solidFill>
+                      <a:schemeClr val="tx1"/>
+                    </a:solidFill>
+                  </a:rPr>
+                  <a:t>Selecting particles </a:t>
+                </a:r>
+                <a:r>
+                  <a:rPr lang="it-IT" sz="2000" dirty="0">
+                    <a:solidFill>
+                      <a:schemeClr val="tx1"/>
+                    </a:solidFill>
+                  </a:rPr>
+                  <a:t>within </a:t>
+                </a:r>
+                <a14:m>
+                  <m:oMath xmlns:m="http://schemas.openxmlformats.org/officeDocument/2006/math">
+                    <m:r>
+                      <a:rPr lang="it-IT" sz="2000" b="0" i="1" smtClean="0">
+                        <a:solidFill>
+                          <a:schemeClr val="tx1"/>
+                        </a:solidFill>
+                        <a:latin typeface="Cambria Math" panose="02040503050406030204" pitchFamily="18" charset="0"/>
+                      </a:rPr>
+                      <m:t>±</m:t>
+                    </m:r>
+                    <m:sSub>
+                      <m:sSubPr>
+                        <m:ctrlPr>
+                          <a:rPr lang="it-IT" sz="2000" b="0" i="1" smtClean="0">
+                            <a:solidFill>
+                              <a:schemeClr val="tx1"/>
+                            </a:solidFill>
+                            <a:latin typeface="Cambria Math" panose="02040503050406030204" pitchFamily="18" charset="0"/>
+                          </a:rPr>
+                        </m:ctrlPr>
+                      </m:sSubPr>
+                      <m:e>
+                        <m:r>
+                          <a:rPr lang="it-IT" sz="2000" b="0" i="1" smtClean="0">
+                            <a:solidFill>
+                              <a:schemeClr val="tx1"/>
+                            </a:solidFill>
+                            <a:latin typeface="Cambria Math" panose="02040503050406030204" pitchFamily="18" charset="0"/>
+                          </a:rPr>
+                          <m:t>𝜃</m:t>
+                        </m:r>
+                      </m:e>
+                      <m:sub>
+                        <m:r>
+                          <a:rPr lang="it-IT" sz="2000" b="0" i="1" smtClean="0">
+                            <a:solidFill>
+                              <a:schemeClr val="tx1"/>
+                            </a:solidFill>
+                            <a:latin typeface="Cambria Math" panose="02040503050406030204" pitchFamily="18" charset="0"/>
+                          </a:rPr>
+                          <m:t>𝐿</m:t>
+                        </m:r>
+                      </m:sub>
+                    </m:sSub>
+                    <m:r>
+                      <a:rPr lang="it-IT" sz="2000" b="0" i="1" smtClean="0">
+                        <a:solidFill>
+                          <a:schemeClr val="tx1"/>
+                        </a:solidFill>
+                        <a:latin typeface="Cambria Math" panose="02040503050406030204" pitchFamily="18" charset="0"/>
+                      </a:rPr>
+                      <m:t>/2</m:t>
+                    </m:r>
+                  </m:oMath>
+                </a14:m>
+                <a:endParaRPr lang="it-IT" sz="2000" dirty="0">
+                  <a:solidFill>
+                    <a:schemeClr val="tx1"/>
+                  </a:solidFill>
+                </a:endParaRPr>
+              </a:p>
+            </p:txBody>
+          </p:sp>
+        </mc:Choice>
+        <mc:Fallback>
+          <p:sp>
+            <p:nvSpPr>
+              <p:cNvPr id="20" name="Rectangle: Rounded Corners 19">
+                <a:extLst>
+                  <a:ext uri="{FF2B5EF4-FFF2-40B4-BE49-F238E27FC236}">
+                    <a16:creationId xmlns:a16="http://schemas.microsoft.com/office/drawing/2014/main" id="{48C86449-AC7F-22CC-FD5A-F63BAD3BFD56}"/>
+                  </a:ext>
+                </a:extLst>
+              </p:cNvPr>
+              <p:cNvSpPr>
+                <a:spLocks noRot="1" noChangeAspect="1" noMove="1" noResize="1" noEditPoints="1" noAdjustHandles="1" noChangeArrowheads="1" noChangeShapeType="1" noTextEdit="1"/>
+              </p:cNvSpPr>
+              <p:nvPr/>
+            </p:nvSpPr>
+            <p:spPr>
+              <a:xfrm>
+                <a:off x="4104640" y="2535726"/>
+                <a:ext cx="7391360" cy="1032775"/>
+              </a:xfrm>
+              <a:prstGeom prst="roundRect">
+                <a:avLst>
+                  <a:gd name="adj" fmla="val 0"/>
+                </a:avLst>
               </a:prstGeom>
               <a:blipFill>
                 <a:blip r:embed="rId4"/>
                 <a:stretch>
-                  <a:fillRect l="-1292" t="-1629" r="-1895"/>
+                  <a:fillRect/>
                 </a:stretch>
               </a:blipFill>
+              <a:ln w="38100">
+                <a:solidFill>
+                  <a:srgbClr val="92D050"/>
+                </a:solidFill>
+              </a:ln>
+            </p:spPr>
+            <p:txBody>
+              <a:bodyPr/>
+              <a:lstStyle/>
+              <a:p>
+                <a:r>
+                  <a:rPr lang="it-IT">
+                    <a:noFill/>
+                  </a:rPr>
+                  <a:t> </a:t>
+                </a:r>
+              </a:p>
+            </p:txBody>
+          </p:sp>
+        </mc:Fallback>
+      </mc:AlternateContent>
+      <p:pic>
+        <p:nvPicPr>
+          <p:cNvPr id="22" name="Picture 21">
+            <a:extLst>
+              <a:ext uri="{FF2B5EF4-FFF2-40B4-BE49-F238E27FC236}">
+                <a16:creationId xmlns:a16="http://schemas.microsoft.com/office/drawing/2014/main" id="{E730E506-B211-AFBF-18AB-337E8DA1B187}"/>
+              </a:ext>
+            </a:extLst>
+          </p:cNvPr>
+          <p:cNvPicPr>
+            <a:picLocks noChangeAspect="1"/>
+          </p:cNvPicPr>
+          <p:nvPr/>
+        </p:nvPicPr>
+        <p:blipFill>
+          <a:blip r:embed="rId5">
+            <a:extLst>
+              <a:ext uri="{28A0092B-C50C-407E-A947-70E740481C1C}">
+                <a14:useLocalDpi xmlns:a14="http://schemas.microsoft.com/office/drawing/2010/main" val="0"/>
+              </a:ext>
+            </a:extLst>
+          </a:blip>
+          <a:srcRect r="50926"/>
+          <a:stretch>
+            <a:fillRect/>
+          </a:stretch>
+        </p:blipFill>
+        <p:spPr>
+          <a:xfrm>
+            <a:off x="399870" y="1334755"/>
+            <a:ext cx="2544000" cy="2160000"/>
+          </a:xfrm>
+          <a:prstGeom prst="rect">
+            <a:avLst/>
+          </a:prstGeom>
+        </p:spPr>
+      </p:pic>
+      <p:pic>
+        <p:nvPicPr>
+          <p:cNvPr id="24" name="Picture 23">
+            <a:extLst>
+              <a:ext uri="{FF2B5EF4-FFF2-40B4-BE49-F238E27FC236}">
+                <a16:creationId xmlns:a16="http://schemas.microsoft.com/office/drawing/2014/main" id="{26BB24F4-A7D3-D0AB-64BA-9E564F4B6382}"/>
+              </a:ext>
+            </a:extLst>
+          </p:cNvPr>
+          <p:cNvPicPr>
+            <a:picLocks noChangeAspect="1"/>
+          </p:cNvPicPr>
+          <p:nvPr/>
+        </p:nvPicPr>
+        <p:blipFill>
+          <a:blip r:embed="rId6">
+            <a:extLst>
+              <a:ext uri="{28A0092B-C50C-407E-A947-70E740481C1C}">
+                <a14:useLocalDpi xmlns:a14="http://schemas.microsoft.com/office/drawing/2010/main" val="0"/>
+              </a:ext>
+            </a:extLst>
+          </a:blip>
+          <a:srcRect l="-1" r="50575"/>
+          <a:stretch>
+            <a:fillRect/>
+          </a:stretch>
+        </p:blipFill>
+        <p:spPr>
+          <a:xfrm>
+            <a:off x="1360483" y="3606765"/>
+            <a:ext cx="2562194" cy="2160000"/>
+          </a:xfrm>
+          <a:prstGeom prst="rect">
+            <a:avLst/>
+          </a:prstGeom>
+        </p:spPr>
+      </p:pic>
+      <p:pic>
+        <p:nvPicPr>
+          <p:cNvPr id="26" name="Picture 25">
+            <a:extLst>
+              <a:ext uri="{FF2B5EF4-FFF2-40B4-BE49-F238E27FC236}">
+                <a16:creationId xmlns:a16="http://schemas.microsoft.com/office/drawing/2014/main" id="{E0EF9C74-5806-9BFB-7701-BB3ED7BE2411}"/>
+              </a:ext>
+            </a:extLst>
+          </p:cNvPr>
+          <p:cNvPicPr>
+            <a:picLocks noChangeAspect="1"/>
+          </p:cNvPicPr>
+          <p:nvPr/>
+        </p:nvPicPr>
+        <p:blipFill>
+          <a:blip r:embed="rId6">
+            <a:extLst>
+              <a:ext uri="{28A0092B-C50C-407E-A947-70E740481C1C}">
+                <a14:useLocalDpi xmlns:a14="http://schemas.microsoft.com/office/drawing/2010/main" val="0"/>
+              </a:ext>
+            </a:extLst>
+          </a:blip>
+          <a:srcRect l="49868" r="-903"/>
+          <a:stretch>
+            <a:fillRect/>
+          </a:stretch>
+        </p:blipFill>
+        <p:spPr>
+          <a:xfrm>
+            <a:off x="8764757" y="3610754"/>
+            <a:ext cx="3202489" cy="2614640"/>
+          </a:xfrm>
+          <a:prstGeom prst="rect">
+            <a:avLst/>
+          </a:prstGeom>
+        </p:spPr>
+      </p:pic>
+      <p:sp>
+        <p:nvSpPr>
+          <p:cNvPr id="29" name="Arc 28">
+            <a:extLst>
+              <a:ext uri="{FF2B5EF4-FFF2-40B4-BE49-F238E27FC236}">
+                <a16:creationId xmlns:a16="http://schemas.microsoft.com/office/drawing/2014/main" id="{B0747047-39A7-CEE8-E5E4-CBDEBD54CF38}"/>
+              </a:ext>
+            </a:extLst>
+          </p:cNvPr>
+          <p:cNvSpPr>
+            <a:spLocks noChangeAspect="1"/>
+          </p:cNvSpPr>
+          <p:nvPr/>
+        </p:nvSpPr>
+        <p:spPr>
+          <a:xfrm>
+            <a:off x="1146454" y="2346765"/>
+            <a:ext cx="2520000" cy="2520000"/>
+          </a:xfrm>
+          <a:prstGeom prst="arc">
+            <a:avLst>
+              <a:gd name="adj1" fmla="val 17798565"/>
+              <a:gd name="adj2" fmla="val 0"/>
+            </a:avLst>
+          </a:prstGeom>
+          <a:ln w="28575">
+            <a:solidFill>
+              <a:srgbClr val="92D050"/>
+            </a:solidFill>
+            <a:headEnd type="none" w="med" len="med"/>
+            <a:tailEnd type="arrow" w="med" len="med"/>
+          </a:ln>
+        </p:spPr>
+        <p:style>
+          <a:lnRef idx="2">
+            <a:schemeClr val="accent1"/>
+          </a:lnRef>
+          <a:fillRef idx="0">
+            <a:schemeClr val="accent1"/>
+          </a:fillRef>
+          <a:effectRef idx="1">
+            <a:schemeClr val="accent1"/>
+          </a:effectRef>
+          <a:fontRef idx="minor">
+            <a:schemeClr val="tx1"/>
+          </a:fontRef>
+        </p:style>
+        <p:txBody>
+          <a:bodyPr rtlCol="0" anchor="ctr"/>
+          <a:lstStyle/>
+          <a:p>
+            <a:pPr algn="ctr"/>
+            <a:endParaRPr lang="it-IT"/>
+          </a:p>
+        </p:txBody>
+      </p:sp>
+      <mc:AlternateContent xmlns:mc="http://schemas.openxmlformats.org/markup-compatibility/2006">
+        <mc:Choice xmlns:a14="http://schemas.microsoft.com/office/drawing/2010/main" Requires="a14">
+          <p:sp>
+            <p:nvSpPr>
+              <p:cNvPr id="31" name="Rectangle: Rounded Corners 30">
+                <a:extLst>
+                  <a:ext uri="{FF2B5EF4-FFF2-40B4-BE49-F238E27FC236}">
+                    <a16:creationId xmlns:a16="http://schemas.microsoft.com/office/drawing/2014/main" id="{9FE206EB-815D-C99B-CDE3-656A9F4C7970}"/>
+                  </a:ext>
+                </a:extLst>
+              </p:cNvPr>
+              <p:cNvSpPr/>
+              <p:nvPr/>
+            </p:nvSpPr>
+            <p:spPr>
+              <a:xfrm>
+                <a:off x="4104640" y="3696308"/>
+                <a:ext cx="4660117" cy="1032775"/>
+              </a:xfrm>
+              <a:prstGeom prst="roundRect">
+                <a:avLst>
+                  <a:gd name="adj" fmla="val 0"/>
+                </a:avLst>
+              </a:prstGeom>
+              <a:solidFill>
+                <a:schemeClr val="bg1"/>
+              </a:solidFill>
+              <a:ln w="38100">
+                <a:solidFill>
+                  <a:srgbClr val="92D050"/>
+                </a:solidFill>
+              </a:ln>
+            </p:spPr>
+            <p:style>
+              <a:lnRef idx="2">
+                <a:schemeClr val="accent1">
+                  <a:shade val="15000"/>
+                </a:schemeClr>
+              </a:lnRef>
+              <a:fillRef idx="1">
+                <a:schemeClr val="accent1"/>
+              </a:fillRef>
+              <a:effectRef idx="0">
+                <a:schemeClr val="accent1"/>
+              </a:effectRef>
+              <a:fontRef idx="minor">
+                <a:schemeClr val="lt1"/>
+              </a:fontRef>
+            </p:style>
+            <p:txBody>
+              <a:bodyPr rtlCol="0" anchor="ctr"/>
+              <a:lstStyle/>
+              <a:p>
+                <a:pPr algn="ctr"/>
+                <a14:m>
+                  <m:oMathPara xmlns:m="http://schemas.openxmlformats.org/officeDocument/2006/math">
+                    <m:oMath>
+                      <m:r>
+                        <a:rPr lang="it-IT" sz="2000" b="0" i="1" smtClean="0">
+                          <a:solidFill>
+                            <a:schemeClr val="tx1"/>
+                          </a:solidFill>
+                          <a:latin typeface="Cambria Math" panose="02040503050406030204" pitchFamily="18" charset="0"/>
+                        </a:rPr>
+                        <m:t>𝜖</m:t>
+                      </m:r>
+                      <m:r>
+                        <a:rPr lang="it-IT" sz="2000" b="0" i="1" smtClean="0">
+                          <a:solidFill>
+                            <a:schemeClr val="tx1"/>
+                          </a:solidFill>
+                          <a:latin typeface="Cambria Math" panose="02040503050406030204" pitchFamily="18" charset="0"/>
+                        </a:rPr>
+                        <m:t>=</m:t>
+                      </m:r>
+                      <m:sSub>
+                        <m:sSubPr>
+                          <m:ctrlPr>
+                            <a:rPr lang="it-IT" sz="2000" b="0" i="1" smtClean="0">
+                              <a:solidFill>
+                                <a:schemeClr val="tx1"/>
+                              </a:solidFill>
+                              <a:latin typeface="Cambria Math" panose="02040503050406030204" pitchFamily="18" charset="0"/>
+                            </a:rPr>
+                          </m:ctrlPr>
+                        </m:sSubPr>
+                        <m:e>
+                          <m:r>
+                            <a:rPr lang="it-IT" sz="2000" b="0" i="1" smtClean="0">
+                              <a:solidFill>
+                                <a:schemeClr val="tx1"/>
+                              </a:solidFill>
+                              <a:latin typeface="Cambria Math" panose="02040503050406030204" pitchFamily="18" charset="0"/>
+                            </a:rPr>
+                            <m:t>𝑁</m:t>
+                          </m:r>
+                        </m:e>
+                        <m:sub>
+                          <m:r>
+                            <a:rPr lang="it-IT" sz="2000" b="0" i="1" smtClean="0">
+                              <a:solidFill>
+                                <a:schemeClr val="tx1"/>
+                              </a:solidFill>
+                              <a:latin typeface="Cambria Math" panose="02040503050406030204" pitchFamily="18" charset="0"/>
+                            </a:rPr>
+                            <m:t>𝑐ℎ</m:t>
+                          </m:r>
+                        </m:sub>
+                      </m:sSub>
+                      <m:r>
+                        <a:rPr lang="it-IT" sz="2000" b="0" i="1" smtClean="0">
+                          <a:solidFill>
+                            <a:schemeClr val="tx1"/>
+                          </a:solidFill>
+                          <a:latin typeface="Cambria Math" panose="02040503050406030204" pitchFamily="18" charset="0"/>
+                        </a:rPr>
+                        <m:t>/</m:t>
+                      </m:r>
+                      <m:sSub>
+                        <m:sSubPr>
+                          <m:ctrlPr>
+                            <a:rPr lang="it-IT" sz="2000" b="0" i="1" smtClean="0">
+                              <a:solidFill>
+                                <a:schemeClr val="tx1"/>
+                              </a:solidFill>
+                              <a:latin typeface="Cambria Math" panose="02040503050406030204" pitchFamily="18" charset="0"/>
+                            </a:rPr>
+                          </m:ctrlPr>
+                        </m:sSubPr>
+                        <m:e>
+                          <m:r>
+                            <a:rPr lang="it-IT" sz="2000" b="0" i="1" smtClean="0">
+                              <a:solidFill>
+                                <a:schemeClr val="tx1"/>
+                              </a:solidFill>
+                              <a:latin typeface="Cambria Math" panose="02040503050406030204" pitchFamily="18" charset="0"/>
+                            </a:rPr>
+                            <m:t>𝑁</m:t>
+                          </m:r>
+                        </m:e>
+                        <m:sub>
+                          <m:r>
+                            <a:rPr lang="it-IT" sz="2000" b="0" i="1" smtClean="0">
+                              <a:solidFill>
+                                <a:schemeClr val="tx1"/>
+                              </a:solidFill>
+                              <a:latin typeface="Cambria Math" panose="02040503050406030204" pitchFamily="18" charset="0"/>
+                            </a:rPr>
+                            <m:t>𝑡𝑜𝑡</m:t>
+                          </m:r>
+                        </m:sub>
+                      </m:sSub>
+                      <m:r>
+                        <a:rPr lang="it-IT" sz="2000" b="0" i="1" smtClean="0">
+                          <a:solidFill>
+                            <a:schemeClr val="tx1"/>
+                          </a:solidFill>
+                          <a:latin typeface="Cambria Math" panose="02040503050406030204" pitchFamily="18" charset="0"/>
+                        </a:rPr>
+                        <m:t>∼75%</m:t>
+                      </m:r>
+                    </m:oMath>
+                  </m:oMathPara>
+                </a14:m>
+                <a:endParaRPr lang="it-IT" sz="2000" dirty="0">
+                  <a:solidFill>
+                    <a:schemeClr val="tx1"/>
+                  </a:solidFill>
+                </a:endParaRPr>
+              </a:p>
+            </p:txBody>
+          </p:sp>
+        </mc:Choice>
+        <mc:Fallback>
+          <p:sp>
+            <p:nvSpPr>
+              <p:cNvPr id="31" name="Rectangle: Rounded Corners 30">
+                <a:extLst>
+                  <a:ext uri="{FF2B5EF4-FFF2-40B4-BE49-F238E27FC236}">
+                    <a16:creationId xmlns:a16="http://schemas.microsoft.com/office/drawing/2014/main" id="{9FE206EB-815D-C99B-CDE3-656A9F4C7970}"/>
+                  </a:ext>
+                </a:extLst>
+              </p:cNvPr>
+              <p:cNvSpPr>
+                <a:spLocks noRot="1" noChangeAspect="1" noMove="1" noResize="1" noEditPoints="1" noAdjustHandles="1" noChangeArrowheads="1" noChangeShapeType="1" noTextEdit="1"/>
+              </p:cNvSpPr>
+              <p:nvPr/>
+            </p:nvSpPr>
+            <p:spPr>
+              <a:xfrm>
+                <a:off x="4104640" y="3696308"/>
+                <a:ext cx="4660117" cy="1032775"/>
+              </a:xfrm>
+              <a:prstGeom prst="roundRect">
+                <a:avLst>
+                  <a:gd name="adj" fmla="val 0"/>
+                </a:avLst>
+              </a:prstGeom>
+              <a:blipFill>
+                <a:blip r:embed="rId7"/>
+                <a:stretch>
+                  <a:fillRect/>
+                </a:stretch>
+              </a:blipFill>
+              <a:ln w="38100">
+                <a:solidFill>
+                  <a:srgbClr val="92D050"/>
+                </a:solidFill>
+              </a:ln>
             </p:spPr>
             <p:txBody>
               <a:bodyPr/>

--- a/slides/week11.pptx
+++ b/slides/week11.pptx
@@ -211,7 +211,7 @@
           <a:p>
             <a:fld id="{D7A422DF-4847-4D6E-BB97-9B75D56F5D74}" type="datetimeFigureOut">
               <a:rPr lang="it-IT" smtClean="0"/>
-              <a:t>17/09/2026</a:t>
+              <a:t>18/09/2026</a:t>
             </a:fld>
             <a:endParaRPr lang="it-IT"/>
           </a:p>
@@ -2260,7 +2260,7 @@
           <a:p>
             <a:fld id="{4B734174-4AE7-4BE8-A29D-97641C0FB41A}" type="datetimeFigureOut">
               <a:rPr lang="it-IT" smtClean="0"/>
-              <a:t>17/09/2026</a:t>
+              <a:t>18/09/2026</a:t>
             </a:fld>
             <a:endParaRPr lang="it-IT"/>
           </a:p>
@@ -2458,7 +2458,7 @@
           <a:p>
             <a:fld id="{4B734174-4AE7-4BE8-A29D-97641C0FB41A}" type="datetimeFigureOut">
               <a:rPr lang="it-IT" smtClean="0"/>
-              <a:t>17/09/2026</a:t>
+              <a:t>18/09/2026</a:t>
             </a:fld>
             <a:endParaRPr lang="it-IT"/>
           </a:p>
@@ -2666,7 +2666,7 @@
           <a:p>
             <a:fld id="{4B734174-4AE7-4BE8-A29D-97641C0FB41A}" type="datetimeFigureOut">
               <a:rPr lang="it-IT" smtClean="0"/>
-              <a:t>17/09/2026</a:t>
+              <a:t>18/09/2026</a:t>
             </a:fld>
             <a:endParaRPr lang="it-IT"/>
           </a:p>
@@ -2864,7 +2864,7 @@
           <a:p>
             <a:fld id="{4B734174-4AE7-4BE8-A29D-97641C0FB41A}" type="datetimeFigureOut">
               <a:rPr lang="it-IT" smtClean="0"/>
-              <a:t>17/09/2026</a:t>
+              <a:t>18/09/2026</a:t>
             </a:fld>
             <a:endParaRPr lang="it-IT"/>
           </a:p>
@@ -3139,7 +3139,7 @@
           <a:p>
             <a:fld id="{4B734174-4AE7-4BE8-A29D-97641C0FB41A}" type="datetimeFigureOut">
               <a:rPr lang="it-IT" smtClean="0"/>
-              <a:t>17/09/2026</a:t>
+              <a:t>18/09/2026</a:t>
             </a:fld>
             <a:endParaRPr lang="it-IT"/>
           </a:p>
@@ -3404,7 +3404,7 @@
           <a:p>
             <a:fld id="{4B734174-4AE7-4BE8-A29D-97641C0FB41A}" type="datetimeFigureOut">
               <a:rPr lang="it-IT" smtClean="0"/>
-              <a:t>17/09/2026</a:t>
+              <a:t>18/09/2026</a:t>
             </a:fld>
             <a:endParaRPr lang="it-IT"/>
           </a:p>
@@ -3816,7 +3816,7 @@
           <a:p>
             <a:fld id="{4B734174-4AE7-4BE8-A29D-97641C0FB41A}" type="datetimeFigureOut">
               <a:rPr lang="it-IT" smtClean="0"/>
-              <a:t>17/09/2026</a:t>
+              <a:t>18/09/2026</a:t>
             </a:fld>
             <a:endParaRPr lang="it-IT"/>
           </a:p>
@@ -3957,7 +3957,7 @@
           <a:p>
             <a:fld id="{4B734174-4AE7-4BE8-A29D-97641C0FB41A}" type="datetimeFigureOut">
               <a:rPr lang="it-IT" smtClean="0"/>
-              <a:t>17/09/2026</a:t>
+              <a:t>18/09/2026</a:t>
             </a:fld>
             <a:endParaRPr lang="it-IT"/>
           </a:p>
@@ -4070,7 +4070,7 @@
           <a:p>
             <a:fld id="{4B734174-4AE7-4BE8-A29D-97641C0FB41A}" type="datetimeFigureOut">
               <a:rPr lang="it-IT" smtClean="0"/>
-              <a:t>17/09/2026</a:t>
+              <a:t>18/09/2026</a:t>
             </a:fld>
             <a:endParaRPr lang="it-IT"/>
           </a:p>
@@ -4381,7 +4381,7 @@
           <a:p>
             <a:fld id="{4B734174-4AE7-4BE8-A29D-97641C0FB41A}" type="datetimeFigureOut">
               <a:rPr lang="it-IT" smtClean="0"/>
-              <a:t>17/09/2026</a:t>
+              <a:t>18/09/2026</a:t>
             </a:fld>
             <a:endParaRPr lang="it-IT"/>
           </a:p>
@@ -4669,7 +4669,7 @@
           <a:p>
             <a:fld id="{4B734174-4AE7-4BE8-A29D-97641C0FB41A}" type="datetimeFigureOut">
               <a:rPr lang="it-IT" smtClean="0"/>
-              <a:t>17/09/2026</a:t>
+              <a:t>18/09/2026</a:t>
             </a:fld>
             <a:endParaRPr lang="it-IT"/>
           </a:p>
@@ -4910,7 +4910,7 @@
           <a:p>
             <a:fld id="{4B734174-4AE7-4BE8-A29D-97641C0FB41A}" type="datetimeFigureOut">
               <a:rPr lang="it-IT" smtClean="0"/>
-              <a:t>17/09/2026</a:t>
+              <a:t>18/09/2026</a:t>
             </a:fld>
             <a:endParaRPr lang="it-IT"/>
           </a:p>
@@ -8238,6 +8238,43 @@
           <a:chExt cx="0" cy="0"/>
         </a:xfrm>
       </p:grpSpPr>
+      <p:pic>
+        <p:nvPicPr>
+          <p:cNvPr id="24" name="Picture 23">
+            <a:extLst>
+              <a:ext uri="{FF2B5EF4-FFF2-40B4-BE49-F238E27FC236}">
+                <a16:creationId xmlns:a16="http://schemas.microsoft.com/office/drawing/2014/main" id="{26BB24F4-A7D3-D0AB-64BA-9E564F4B6382}"/>
+              </a:ext>
+            </a:extLst>
+          </p:cNvPr>
+          <p:cNvPicPr>
+            <a:picLocks noChangeAspect="1"/>
+          </p:cNvPicPr>
+          <p:nvPr/>
+        </p:nvPicPr>
+        <p:blipFill>
+          <a:blip r:embed="rId3">
+            <a:extLst>
+              <a:ext uri="{28A0092B-C50C-407E-A947-70E740481C1C}">
+                <a14:useLocalDpi xmlns:a14="http://schemas.microsoft.com/office/drawing/2010/main" val="0"/>
+              </a:ext>
+            </a:extLst>
+          </a:blip>
+          <a:srcRect l="-1" r="50575"/>
+          <a:stretch>
+            <a:fillRect/>
+          </a:stretch>
+        </p:blipFill>
+        <p:spPr>
+          <a:xfrm>
+            <a:off x="1115414" y="3959951"/>
+            <a:ext cx="2989226" cy="2520000"/>
+          </a:xfrm>
+          <a:prstGeom prst="rect">
+            <a:avLst/>
+          </a:prstGeom>
+        </p:spPr>
+      </p:pic>
       <p:sp>
         <p:nvSpPr>
           <p:cNvPr id="2" name="Titolo 1">
@@ -8906,8 +8943,8 @@
           </a:p>
         </p:txBody>
       </p:sp>
-      <mc:AlternateContent xmlns:mc="http://schemas.openxmlformats.org/markup-compatibility/2006">
-        <mc:Choice xmlns:a14="http://schemas.microsoft.com/office/drawing/2010/main" Requires="a14">
+      <mc:AlternateContent xmlns:mc="http://schemas.openxmlformats.org/markup-compatibility/2006" xmlns:a14="http://schemas.microsoft.com/office/drawing/2010/main">
+        <mc:Choice Requires="a14">
           <p:sp>
             <p:nvSpPr>
               <p:cNvPr id="18" name="Rectangle: Rounded Corners 17">
@@ -9145,7 +9182,7 @@
             </p:txBody>
           </p:sp>
         </mc:Choice>
-        <mc:Fallback>
+        <mc:Fallback xmlns="">
           <p:sp>
             <p:nvSpPr>
               <p:cNvPr id="18" name="Rectangle: Rounded Corners 17">
@@ -9163,193 +9200,6 @@
             <p:spPr>
               <a:xfrm>
                 <a:off x="4104640" y="1375144"/>
-                <a:ext cx="7391360" cy="1032775"/>
-              </a:xfrm>
-              <a:prstGeom prst="roundRect">
-                <a:avLst>
-                  <a:gd name="adj" fmla="val 0"/>
-                </a:avLst>
-              </a:prstGeom>
-              <a:blipFill>
-                <a:blip r:embed="rId3"/>
-                <a:stretch>
-                  <a:fillRect/>
-                </a:stretch>
-              </a:blipFill>
-              <a:ln w="38100">
-                <a:solidFill>
-                  <a:srgbClr val="92D050"/>
-                </a:solidFill>
-              </a:ln>
-            </p:spPr>
-            <p:txBody>
-              <a:bodyPr/>
-              <a:lstStyle/>
-              <a:p>
-                <a:r>
-                  <a:rPr lang="it-IT">
-                    <a:noFill/>
-                  </a:rPr>
-                  <a:t> </a:t>
-                </a:r>
-              </a:p>
-            </p:txBody>
-          </p:sp>
-        </mc:Fallback>
-      </mc:AlternateContent>
-      <mc:AlternateContent xmlns:mc="http://schemas.openxmlformats.org/markup-compatibility/2006">
-        <mc:Choice xmlns:a14="http://schemas.microsoft.com/office/drawing/2010/main" Requires="a14">
-          <p:sp>
-            <p:nvSpPr>
-              <p:cNvPr id="20" name="Rectangle: Rounded Corners 19">
-                <a:extLst>
-                  <a:ext uri="{FF2B5EF4-FFF2-40B4-BE49-F238E27FC236}">
-                    <a16:creationId xmlns:a16="http://schemas.microsoft.com/office/drawing/2014/main" id="{48C86449-AC7F-22CC-FD5A-F63BAD3BFD56}"/>
-                  </a:ext>
-                </a:extLst>
-              </p:cNvPr>
-              <p:cNvSpPr/>
-              <p:nvPr/>
-            </p:nvSpPr>
-            <p:spPr>
-              <a:xfrm>
-                <a:off x="4104640" y="2535726"/>
-                <a:ext cx="7391360" cy="1032775"/>
-              </a:xfrm>
-              <a:prstGeom prst="roundRect">
-                <a:avLst>
-                  <a:gd name="adj" fmla="val 0"/>
-                </a:avLst>
-              </a:prstGeom>
-              <a:solidFill>
-                <a:schemeClr val="bg1"/>
-              </a:solidFill>
-              <a:ln w="38100">
-                <a:solidFill>
-                  <a:srgbClr val="92D050"/>
-                </a:solidFill>
-              </a:ln>
-            </p:spPr>
-            <p:style>
-              <a:lnRef idx="2">
-                <a:schemeClr val="accent1">
-                  <a:shade val="15000"/>
-                </a:schemeClr>
-              </a:lnRef>
-              <a:fillRef idx="1">
-                <a:schemeClr val="accent1"/>
-              </a:fillRef>
-              <a:effectRef idx="0">
-                <a:schemeClr val="accent1"/>
-              </a:effectRef>
-              <a:fontRef idx="minor">
-                <a:schemeClr val="lt1"/>
-              </a:fontRef>
-            </p:style>
-            <p:txBody>
-              <a:bodyPr rtlCol="0" anchor="ctr"/>
-              <a:lstStyle/>
-              <a:p>
-                <a:pPr algn="ctr"/>
-                <a:r>
-                  <a:rPr lang="en-US" sz="2000" dirty="0">
-                    <a:solidFill>
-                      <a:schemeClr val="tx1"/>
-                    </a:solidFill>
-                  </a:rPr>
-                  <a:t>Selecting particles </a:t>
-                </a:r>
-                <a:r>
-                  <a:rPr lang="it-IT" sz="2000" dirty="0">
-                    <a:solidFill>
-                      <a:schemeClr val="tx1"/>
-                    </a:solidFill>
-                  </a:rPr>
-                  <a:t>within </a:t>
-                </a:r>
-                <a14:m>
-                  <m:oMath xmlns:m="http://schemas.openxmlformats.org/officeDocument/2006/math">
-                    <m:r>
-                      <a:rPr lang="it-IT" sz="2000" b="0" i="1" smtClean="0">
-                        <a:solidFill>
-                          <a:schemeClr val="tx1"/>
-                        </a:solidFill>
-                        <a:latin typeface="Cambria Math" panose="02040503050406030204" pitchFamily="18" charset="0"/>
-                      </a:rPr>
-                      <m:t>±</m:t>
-                    </m:r>
-                    <m:sSub>
-                      <m:sSubPr>
-                        <m:ctrlPr>
-                          <a:rPr lang="it-IT" sz="2000" b="0" i="1" smtClean="0">
-                            <a:solidFill>
-                              <a:schemeClr val="tx1"/>
-                            </a:solidFill>
-                            <a:latin typeface="Cambria Math" panose="02040503050406030204" pitchFamily="18" charset="0"/>
-                          </a:rPr>
-                        </m:ctrlPr>
-                      </m:sSubPr>
-                      <m:e>
-                        <m:r>
-                          <a:rPr lang="it-IT" sz="2000" b="0" i="1" smtClean="0">
-                            <a:solidFill>
-                              <a:schemeClr val="tx1"/>
-                            </a:solidFill>
-                            <a:latin typeface="Cambria Math" panose="02040503050406030204" pitchFamily="18" charset="0"/>
-                          </a:rPr>
-                          <m:t>𝜃</m:t>
-                        </m:r>
-                      </m:e>
-                      <m:sub>
-                        <m:r>
-                          <a:rPr lang="it-IT" sz="2000" b="0" i="1" smtClean="0">
-                            <a:solidFill>
-                              <a:schemeClr val="tx1"/>
-                            </a:solidFill>
-                            <a:latin typeface="Cambria Math" panose="02040503050406030204" pitchFamily="18" charset="0"/>
-                          </a:rPr>
-                          <m:t>𝐿</m:t>
-                        </m:r>
-                      </m:sub>
-                    </m:sSub>
-                    <m:r>
-                      <a:rPr lang="it-IT" sz="2000" b="0" i="1" smtClean="0">
-                        <a:solidFill>
-                          <a:schemeClr val="tx1"/>
-                        </a:solidFill>
-                        <a:latin typeface="Cambria Math" panose="02040503050406030204" pitchFamily="18" charset="0"/>
-                      </a:rPr>
-                      <m:t>/2</m:t>
-                    </m:r>
-                  </m:oMath>
-                </a14:m>
-                <a:endParaRPr lang="it-IT" sz="2000" dirty="0">
-                  <a:solidFill>
-                    <a:schemeClr val="tx1"/>
-                  </a:solidFill>
-                </a:endParaRPr>
-              </a:p>
-            </p:txBody>
-          </p:sp>
-        </mc:Choice>
-        <mc:Fallback>
-          <p:sp>
-            <p:nvSpPr>
-              <p:cNvPr id="20" name="Rectangle: Rounded Corners 19">
-                <a:extLst>
-                  <a:ext uri="{FF2B5EF4-FFF2-40B4-BE49-F238E27FC236}">
-                    <a16:creationId xmlns:a16="http://schemas.microsoft.com/office/drawing/2014/main" id="{48C86449-AC7F-22CC-FD5A-F63BAD3BFD56}"/>
-                  </a:ext>
-                </a:extLst>
-              </p:cNvPr>
-              <p:cNvSpPr>
-                <a:spLocks noRot="1" noChangeAspect="1" noMove="1" noResize="1" noEditPoints="1" noAdjustHandles="1" noChangeArrowheads="1" noChangeShapeType="1" noTextEdit="1"/>
-              </p:cNvSpPr>
-              <p:nvPr/>
-            </p:nvSpPr>
-            <p:spPr>
-              <a:xfrm>
-                <a:off x="4104640" y="2535726"/>
                 <a:ext cx="7391360" cy="1032775"/>
               </a:xfrm>
               <a:prstGeom prst="roundRect">
@@ -9414,7 +9264,7 @@
         <p:spPr>
           <a:xfrm>
             <a:off x="399870" y="1334755"/>
-            <a:ext cx="2544000" cy="2160000"/>
+            <a:ext cx="2968000" cy="2520000"/>
           </a:xfrm>
           <a:prstGeom prst="rect">
             <a:avLst/>
@@ -9423,10 +9273,10 @@
       </p:pic>
       <p:pic>
         <p:nvPicPr>
-          <p:cNvPr id="24" name="Picture 23">
-            <a:extLst>
-              <a:ext uri="{FF2B5EF4-FFF2-40B4-BE49-F238E27FC236}">
-                <a16:creationId xmlns:a16="http://schemas.microsoft.com/office/drawing/2014/main" id="{26BB24F4-A7D3-D0AB-64BA-9E564F4B6382}"/>
+          <p:cNvPr id="26" name="Picture 25">
+            <a:extLst>
+              <a:ext uri="{FF2B5EF4-FFF2-40B4-BE49-F238E27FC236}">
+                <a16:creationId xmlns:a16="http://schemas.microsoft.com/office/drawing/2014/main" id="{E0EF9C74-5806-9BFB-7701-BB3ED7BE2411}"/>
               </a:ext>
             </a:extLst>
           </p:cNvPr>
@@ -9436,44 +9286,7 @@
           <p:nvPr/>
         </p:nvPicPr>
         <p:blipFill>
-          <a:blip r:embed="rId6">
-            <a:extLst>
-              <a:ext uri="{28A0092B-C50C-407E-A947-70E740481C1C}">
-                <a14:useLocalDpi xmlns:a14="http://schemas.microsoft.com/office/drawing/2010/main" val="0"/>
-              </a:ext>
-            </a:extLst>
-          </a:blip>
-          <a:srcRect l="-1" r="50575"/>
-          <a:stretch>
-            <a:fillRect/>
-          </a:stretch>
-        </p:blipFill>
-        <p:spPr>
-          <a:xfrm>
-            <a:off x="1360483" y="3606765"/>
-            <a:ext cx="2562194" cy="2160000"/>
-          </a:xfrm>
-          <a:prstGeom prst="rect">
-            <a:avLst/>
-          </a:prstGeom>
-        </p:spPr>
-      </p:pic>
-      <p:pic>
-        <p:nvPicPr>
-          <p:cNvPr id="26" name="Picture 25">
-            <a:extLst>
-              <a:ext uri="{FF2B5EF4-FFF2-40B4-BE49-F238E27FC236}">
-                <a16:creationId xmlns:a16="http://schemas.microsoft.com/office/drawing/2014/main" id="{E0EF9C74-5806-9BFB-7701-BB3ED7BE2411}"/>
-              </a:ext>
-            </a:extLst>
-          </p:cNvPr>
-          <p:cNvPicPr>
-            <a:picLocks noChangeAspect="1"/>
-          </p:cNvPicPr>
-          <p:nvPr/>
-        </p:nvPicPr>
-        <p:blipFill>
-          <a:blip r:embed="rId6">
+          <a:blip r:embed="rId4">
             <a:extLst>
               <a:ext uri="{28A0092B-C50C-407E-A947-70E740481C1C}">
                 <a14:useLocalDpi xmlns:a14="http://schemas.microsoft.com/office/drawing/2010/main" val="0"/>
@@ -9487,7 +9300,7 @@
         </p:blipFill>
         <p:spPr>
           <a:xfrm>
-            <a:off x="8764757" y="3610754"/>
+            <a:off x="8764757" y="3773314"/>
             <a:ext cx="3202489" cy="2614640"/>
           </a:xfrm>
           <a:prstGeom prst="rect">
@@ -9510,22 +9323,22 @@
           <p:nvPr/>
         </p:nvSpPr>
         <p:spPr>
-          <a:xfrm>
-            <a:off x="1146454" y="2346765"/>
+          <a:xfrm flipH="1" flipV="1">
+            <a:off x="272610" y="2241086"/>
             <a:ext cx="2520000" cy="2520000"/>
           </a:xfrm>
           <a:prstGeom prst="arc">
             <a:avLst>
-              <a:gd name="adj1" fmla="val 17798565"/>
-              <a:gd name="adj2" fmla="val 0"/>
+              <a:gd name="adj1" fmla="val 17032719"/>
+              <a:gd name="adj2" fmla="val 1186713"/>
             </a:avLst>
           </a:prstGeom>
           <a:ln w="28575">
             <a:solidFill>
               <a:srgbClr val="92D050"/>
             </a:solidFill>
-            <a:headEnd type="none" w="med" len="med"/>
-            <a:tailEnd type="arrow" w="med" len="med"/>
+            <a:headEnd type="arrow" w="med" len="med"/>
+            <a:tailEnd type="none" w="med" len="med"/>
           </a:ln>
         </p:spPr>
         <p:style>
@@ -9567,7 +9380,7 @@
             </p:nvSpPr>
             <p:spPr>
               <a:xfrm>
-                <a:off x="4104640" y="3696308"/>
+                <a:off x="4104640" y="5191574"/>
                 <a:ext cx="4660117" cy="1032775"/>
               </a:xfrm>
               <a:prstGeom prst="roundRect">
@@ -9741,7 +9554,257 @@
             </p:nvSpPr>
             <p:spPr>
               <a:xfrm>
-                <a:off x="4104640" y="3696308"/>
+                <a:off x="4104640" y="5191574"/>
+                <a:ext cx="4660117" cy="1032775"/>
+              </a:xfrm>
+              <a:prstGeom prst="roundRect">
+                <a:avLst>
+                  <a:gd name="adj" fmla="val 0"/>
+                </a:avLst>
+              </a:prstGeom>
+              <a:blipFill>
+                <a:blip r:embed="rId6"/>
+                <a:stretch>
+                  <a:fillRect/>
+                </a:stretch>
+              </a:blipFill>
+              <a:ln w="38100">
+                <a:solidFill>
+                  <a:srgbClr val="92D050"/>
+                </a:solidFill>
+              </a:ln>
+            </p:spPr>
+            <p:txBody>
+              <a:bodyPr/>
+              <a:lstStyle/>
+              <a:p>
+                <a:r>
+                  <a:rPr lang="it-IT">
+                    <a:noFill/>
+                  </a:rPr>
+                  <a:t> </a:t>
+                </a:r>
+              </a:p>
+            </p:txBody>
+          </p:sp>
+        </mc:Fallback>
+      </mc:AlternateContent>
+      <p:sp>
+        <p:nvSpPr>
+          <p:cNvPr id="7" name="Rectangle: Rounded Corners 6">
+            <a:extLst>
+              <a:ext uri="{FF2B5EF4-FFF2-40B4-BE49-F238E27FC236}">
+                <a16:creationId xmlns:a16="http://schemas.microsoft.com/office/drawing/2014/main" id="{CF273278-2797-4648-9046-CF6DFCBEF759}"/>
+              </a:ext>
+            </a:extLst>
+          </p:cNvPr>
+          <p:cNvSpPr/>
+          <p:nvPr/>
+        </p:nvSpPr>
+        <p:spPr>
+          <a:xfrm>
+            <a:off x="4104640" y="2645766"/>
+            <a:ext cx="7391360" cy="1032775"/>
+          </a:xfrm>
+          <a:prstGeom prst="roundRect">
+            <a:avLst>
+              <a:gd name="adj" fmla="val 0"/>
+            </a:avLst>
+          </a:prstGeom>
+          <a:solidFill>
+            <a:schemeClr val="bg1"/>
+          </a:solidFill>
+          <a:ln w="38100">
+            <a:solidFill>
+              <a:srgbClr val="92D050"/>
+            </a:solidFill>
+          </a:ln>
+        </p:spPr>
+        <p:style>
+          <a:lnRef idx="2">
+            <a:schemeClr val="accent1">
+              <a:shade val="15000"/>
+            </a:schemeClr>
+          </a:lnRef>
+          <a:fillRef idx="1">
+            <a:schemeClr val="accent1"/>
+          </a:fillRef>
+          <a:effectRef idx="0">
+            <a:schemeClr val="accent1"/>
+          </a:effectRef>
+          <a:fontRef idx="minor">
+            <a:schemeClr val="lt1"/>
+          </a:fontRef>
+        </p:style>
+        <p:txBody>
+          <a:bodyPr rtlCol="0" anchor="ctr"/>
+          <a:lstStyle/>
+          <a:p>
+            <a:pPr algn="ctr"/>
+            <a:r>
+              <a:rPr lang="it-IT" sz="2000" dirty="0">
+                <a:solidFill>
+                  <a:schemeClr val="tx1"/>
+                </a:solidFill>
+              </a:rPr>
+              <a:t>Also performed the edges analysis: Multiple Coulomb scattering and Channeled particles footprint</a:t>
+            </a:r>
+          </a:p>
+        </p:txBody>
+      </p:sp>
+      <mc:AlternateContent xmlns:mc="http://schemas.openxmlformats.org/markup-compatibility/2006">
+        <mc:Choice xmlns:a14="http://schemas.microsoft.com/office/drawing/2010/main" Requires="a14">
+          <p:sp>
+            <p:nvSpPr>
+              <p:cNvPr id="20" name="Rectangle: Rounded Corners 19">
+                <a:extLst>
+                  <a:ext uri="{FF2B5EF4-FFF2-40B4-BE49-F238E27FC236}">
+                    <a16:creationId xmlns:a16="http://schemas.microsoft.com/office/drawing/2014/main" id="{48C86449-AC7F-22CC-FD5A-F63BAD3BFD56}"/>
+                  </a:ext>
+                </a:extLst>
+              </p:cNvPr>
+              <p:cNvSpPr/>
+              <p:nvPr/>
+            </p:nvSpPr>
+            <p:spPr>
+              <a:xfrm>
+                <a:off x="4104640" y="3916388"/>
+                <a:ext cx="4660117" cy="1032775"/>
+              </a:xfrm>
+              <a:prstGeom prst="roundRect">
+                <a:avLst>
+                  <a:gd name="adj" fmla="val 0"/>
+                </a:avLst>
+              </a:prstGeom>
+              <a:solidFill>
+                <a:schemeClr val="bg1"/>
+              </a:solidFill>
+              <a:ln w="38100">
+                <a:solidFill>
+                  <a:srgbClr val="92D050"/>
+                </a:solidFill>
+              </a:ln>
+            </p:spPr>
+            <p:style>
+              <a:lnRef idx="2">
+                <a:schemeClr val="accent1">
+                  <a:shade val="15000"/>
+                </a:schemeClr>
+              </a:lnRef>
+              <a:fillRef idx="1">
+                <a:schemeClr val="accent1"/>
+              </a:fillRef>
+              <a:effectRef idx="0">
+                <a:schemeClr val="accent1"/>
+              </a:effectRef>
+              <a:fontRef idx="minor">
+                <a:schemeClr val="lt1"/>
+              </a:fontRef>
+            </p:style>
+            <p:txBody>
+              <a:bodyPr rtlCol="0" anchor="ctr"/>
+              <a:lstStyle/>
+              <a:p>
+                <a:pPr algn="ctr"/>
+                <a:r>
+                  <a:rPr lang="en-US" sz="2000" dirty="0">
+                    <a:solidFill>
+                      <a:schemeClr val="tx1"/>
+                    </a:solidFill>
+                  </a:rPr>
+                  <a:t>Selecting particles </a:t>
+                </a:r>
+                <a:r>
+                  <a:rPr lang="it-IT" sz="2000" dirty="0">
+                    <a:solidFill>
+                      <a:schemeClr val="tx1"/>
+                    </a:solidFill>
+                  </a:rPr>
+                  <a:t>within </a:t>
+                </a:r>
+                <a14:m>
+                  <m:oMath xmlns:m="http://schemas.openxmlformats.org/officeDocument/2006/math">
+                    <m:r>
+                      <a:rPr lang="it-IT" sz="2000" b="0" i="1" smtClean="0">
+                        <a:solidFill>
+                          <a:schemeClr val="tx1"/>
+                        </a:solidFill>
+                        <a:latin typeface="Cambria Math" panose="02040503050406030204" pitchFamily="18" charset="0"/>
+                      </a:rPr>
+                      <m:t>±</m:t>
+                    </m:r>
+                    <m:sSub>
+                      <m:sSubPr>
+                        <m:ctrlPr>
+                          <a:rPr lang="it-IT" sz="2000" b="0" i="1" smtClean="0">
+                            <a:solidFill>
+                              <a:schemeClr val="tx1"/>
+                            </a:solidFill>
+                            <a:latin typeface="Cambria Math" panose="02040503050406030204" pitchFamily="18" charset="0"/>
+                          </a:rPr>
+                        </m:ctrlPr>
+                      </m:sSubPr>
+                      <m:e>
+                        <m:r>
+                          <a:rPr lang="it-IT" sz="2000" b="0" i="1" smtClean="0">
+                            <a:solidFill>
+                              <a:schemeClr val="tx1"/>
+                            </a:solidFill>
+                            <a:latin typeface="Cambria Math" panose="02040503050406030204" pitchFamily="18" charset="0"/>
+                          </a:rPr>
+                          <m:t>𝜃</m:t>
+                        </m:r>
+                      </m:e>
+                      <m:sub>
+                        <m:r>
+                          <a:rPr lang="it-IT" sz="2000" b="0" i="1" smtClean="0">
+                            <a:solidFill>
+                              <a:schemeClr val="tx1"/>
+                            </a:solidFill>
+                            <a:latin typeface="Cambria Math" panose="02040503050406030204" pitchFamily="18" charset="0"/>
+                          </a:rPr>
+                          <m:t>𝐿</m:t>
+                        </m:r>
+                      </m:sub>
+                    </m:sSub>
+                    <m:r>
+                      <a:rPr lang="it-IT" sz="2000" b="0" i="1" smtClean="0">
+                        <a:solidFill>
+                          <a:schemeClr val="tx1"/>
+                        </a:solidFill>
+                        <a:latin typeface="Cambria Math" panose="02040503050406030204" pitchFamily="18" charset="0"/>
+                      </a:rPr>
+                      <m:t>/2</m:t>
+                    </m:r>
+                  </m:oMath>
+                </a14:m>
+                <a:endParaRPr lang="it-IT" sz="2000" dirty="0">
+                  <a:solidFill>
+                    <a:schemeClr val="tx1"/>
+                  </a:solidFill>
+                </a:endParaRPr>
+              </a:p>
+            </p:txBody>
+          </p:sp>
+        </mc:Choice>
+        <mc:Fallback>
+          <p:sp>
+            <p:nvSpPr>
+              <p:cNvPr id="20" name="Rectangle: Rounded Corners 19">
+                <a:extLst>
+                  <a:ext uri="{FF2B5EF4-FFF2-40B4-BE49-F238E27FC236}">
+                    <a16:creationId xmlns:a16="http://schemas.microsoft.com/office/drawing/2014/main" id="{48C86449-AC7F-22CC-FD5A-F63BAD3BFD56}"/>
+                  </a:ext>
+                </a:extLst>
+              </p:cNvPr>
+              <p:cNvSpPr>
+                <a:spLocks noRot="1" noChangeAspect="1" noMove="1" noResize="1" noEditPoints="1" noAdjustHandles="1" noChangeArrowheads="1" noChangeShapeType="1" noTextEdit="1"/>
+              </p:cNvSpPr>
+              <p:nvPr/>
+            </p:nvSpPr>
+            <p:spPr>
+              <a:xfrm>
+                <a:off x="4104640" y="3916388"/>
                 <a:ext cx="4660117" cy="1032775"/>
               </a:xfrm>
               <a:prstGeom prst="roundRect">
